--- a/poster-slides/templates/POSTER_EXAMPLE.pptx
+++ b/poster-slides/templates/POSTER_EXAMPLE.pptx
@@ -3555,6 +3555,9 @@
               <a:ext uri="{FF2B5EF4-FFF2-40B4-BE49-F238E27FC236}">
                 <a16:creationId xmlns:a16="http://schemas.microsoft.com/office/drawing/2014/main" id="{85A49E63-9189-F836-785D-ABF4F4040827}"/>
               </a:ext>
+              <a:ext uri="{C183D7F6-B498-43B3-948B-1728B52AA6E4}">
+                <adec:decorative xmlns:adec="http://schemas.microsoft.com/office/drawing/2017/decorative" val="1"/>
+              </a:ext>
             </a:extLst>
           </p:cNvPr>
           <p:cNvSpPr/>
@@ -3607,6 +3610,9 @@
               <a:ext uri="{FF2B5EF4-FFF2-40B4-BE49-F238E27FC236}">
                 <a16:creationId xmlns:a16="http://schemas.microsoft.com/office/drawing/2014/main" id="{635FEA98-AD84-1EF4-6EAD-1683233D7201}"/>
               </a:ext>
+              <a:ext uri="{C183D7F6-B498-43B3-948B-1728B52AA6E4}">
+                <adec:decorative xmlns:adec="http://schemas.microsoft.com/office/drawing/2017/decorative" val="1"/>
+              </a:ext>
             </a:extLst>
           </p:cNvPr>
           <p:cNvSpPr/>
@@ -3655,6 +3661,9 @@
             <a:extLst>
               <a:ext uri="{FF2B5EF4-FFF2-40B4-BE49-F238E27FC236}">
                 <a16:creationId xmlns:a16="http://schemas.microsoft.com/office/drawing/2014/main" id="{43B83C9B-B7C7-4105-B27A-7721FAB1EA43}"/>
+              </a:ext>
+              <a:ext uri="{C183D7F6-B498-43B3-948B-1728B52AA6E4}">
+                <adec:decorative xmlns:adec="http://schemas.microsoft.com/office/drawing/2017/decorative" val="1"/>
               </a:ext>
             </a:extLst>
           </p:cNvPr>
@@ -3710,6 +3719,9 @@
               <a:ext uri="{FF2B5EF4-FFF2-40B4-BE49-F238E27FC236}">
                 <a16:creationId xmlns:a16="http://schemas.microsoft.com/office/drawing/2014/main" id="{6F99C0B5-26A7-73DF-E735-769315F87C40}"/>
               </a:ext>
+              <a:ext uri="{C183D7F6-B498-43B3-948B-1728B52AA6E4}">
+                <adec:decorative xmlns:adec="http://schemas.microsoft.com/office/drawing/2017/decorative" val="1"/>
+              </a:ext>
             </a:extLst>
           </p:cNvPr>
           <p:cNvSpPr/>
@@ -3761,109 +3773,457 @@
       </p:sp>
       <p:sp>
         <p:nvSpPr>
-          <p:cNvPr id="3" name="TextBox 2">
+          <p:cNvPr id="4" name="Rectangle 3">
             <a:extLst>
               <a:ext uri="{FF2B5EF4-FFF2-40B4-BE49-F238E27FC236}">
-                <a16:creationId xmlns:a16="http://schemas.microsoft.com/office/drawing/2014/main" id="{8E35B311-3C19-412C-ADE6-EB2E4158F366}"/>
-              </a:ext>
-            </a:extLst>
-          </p:cNvPr>
-          <p:cNvSpPr txBox="1"/>
-          <p:nvPr/>
-        </p:nvSpPr>
-        <p:spPr>
-          <a:xfrm>
-            <a:off x="389717" y="16100100"/>
-            <a:ext cx="10875349" cy="3704925"/>
-          </a:xfrm>
-          <a:prstGeom prst="rect">
-            <a:avLst/>
-          </a:prstGeom>
-          <a:noFill/>
-        </p:spPr>
-        <p:txBody>
-          <a:bodyPr wrap="square" rtlCol="0">
-            <a:spAutoFit/>
-          </a:bodyPr>
-          <a:lstStyle/>
-          <a:p>
-            <a:pPr marL="514350" indent="-514350">
-              <a:lnSpc>
-                <a:spcPts val="4690"/>
-              </a:lnSpc>
-              <a:spcBef>
-                <a:spcPts val="135"/>
-              </a:spcBef>
-              <a:spcAft>
-                <a:spcPts val="135"/>
-              </a:spcAft>
-              <a:buFont typeface="+mj-lt"/>
-              <a:buAutoNum type="arabicPeriod"/>
-              <a:defRPr/>
-            </a:pPr>
-            <a:r>
-              <a:rPr lang="en-US" altLang="en-US" sz="3200" dirty="0">
-                <a:latin typeface="DM Sans 14pt" pitchFamily="2" charset="77"/>
-                <a:cs typeface="Times New Roman" panose="02020603050405020304" pitchFamily="18" charset="0"/>
-              </a:rPr>
-              <a:t>How many Massachusetts (MA) departments prefer written consent over verbal consent? </a:t>
-            </a:r>
-          </a:p>
-          <a:p>
-            <a:pPr marL="514350" indent="-514350">
-              <a:lnSpc>
-                <a:spcPts val="4690"/>
-              </a:lnSpc>
-              <a:spcBef>
-                <a:spcPts val="135"/>
-              </a:spcBef>
-              <a:spcAft>
-                <a:spcPts val="135"/>
-              </a:spcAft>
-              <a:buFont typeface="+mj-lt"/>
-              <a:buAutoNum type="arabicPeriod"/>
-              <a:defRPr/>
-            </a:pPr>
-            <a:r>
-              <a:rPr lang="en-US" altLang="en-US" sz="3200" dirty="0">
-                <a:latin typeface="DM Sans 14pt" pitchFamily="2" charset="77"/>
-                <a:cs typeface="Times New Roman" panose="02020603050405020304" pitchFamily="18" charset="0"/>
-              </a:rPr>
-              <a:t>Do local demographics predict whether a municipal police department in MA has adopted a written waiver preference? </a:t>
-            </a:r>
-            <a:endParaRPr lang="en-US" sz="3200" b="1" dirty="0">
-              <a:latin typeface="DM Sans 14pt" pitchFamily="2" charset="77"/>
-              <a:cs typeface="Arial" panose="020B0604020202020204" pitchFamily="34" charset="0"/>
-            </a:endParaRPr>
-          </a:p>
-          <a:p>
-            <a:pPr>
-              <a:lnSpc>
-                <a:spcPct val="120000"/>
-              </a:lnSpc>
-            </a:pPr>
-            <a:endParaRPr lang="en-US" sz="3200" dirty="0">
-              <a:latin typeface="DM Sans 14pt" pitchFamily="2" charset="77"/>
-              <a:ea typeface="Georgia" panose="02040502050405020303" pitchFamily="18" charset="0"/>
-              <a:cs typeface="Times New Roman" panose="02020603050405020304" pitchFamily="18" charset="0"/>
-            </a:endParaRPr>
-          </a:p>
-        </p:txBody>
-      </p:sp>
-      <p:sp>
-        <p:nvSpPr>
-          <p:cNvPr id="18" name="TextBox 17">
-            <a:extLst>
-              <a:ext uri="{FF2B5EF4-FFF2-40B4-BE49-F238E27FC236}">
-                <a16:creationId xmlns:a16="http://schemas.microsoft.com/office/drawing/2014/main" id="{BCF37902-2C8D-3049-9881-50CB35F2A6BA}"/>
+                <a16:creationId xmlns:a16="http://schemas.microsoft.com/office/drawing/2014/main" id="{F56A2F1C-4B3F-13EF-8971-EB6C48FB90C5}"/>
               </a:ext>
               <a:ext uri="{C183D7F6-B498-43B3-948B-1728B52AA6E4}">
                 <adec:decorative xmlns:adec="http://schemas.microsoft.com/office/drawing/2017/decorative" val="1"/>
               </a:ext>
             </a:extLst>
           </p:cNvPr>
+          <p:cNvSpPr/>
+          <p:nvPr/>
+        </p:nvSpPr>
+        <p:spPr>
+          <a:xfrm>
+            <a:off x="-63299" y="3636815"/>
+            <a:ext cx="11593246" cy="29347573"/>
+          </a:xfrm>
+          <a:prstGeom prst="rect">
+            <a:avLst/>
+          </a:prstGeom>
+          <a:noFill/>
+          <a:ln w="193675">
+            <a:solidFill>
+              <a:srgbClr val="D00000"/>
+            </a:solidFill>
+          </a:ln>
+        </p:spPr>
+        <p:style>
+          <a:lnRef idx="2">
+            <a:schemeClr val="accent1">
+              <a:shade val="15000"/>
+            </a:schemeClr>
+          </a:lnRef>
+          <a:fillRef idx="1">
+            <a:schemeClr val="accent1"/>
+          </a:fillRef>
+          <a:effectRef idx="0">
+            <a:schemeClr val="accent1"/>
+          </a:effectRef>
+          <a:fontRef idx="minor">
+            <a:schemeClr val="lt1"/>
+          </a:fontRef>
+        </p:style>
+        <p:txBody>
+          <a:bodyPr rtlCol="0" anchor="ctr"/>
+          <a:lstStyle/>
+          <a:p>
+            <a:pPr algn="ctr"/>
+            <a:endParaRPr lang="en-US" dirty="0">
+              <a:solidFill>
+                <a:srgbClr val="D00000"/>
+              </a:solidFill>
+            </a:endParaRPr>
+          </a:p>
+        </p:txBody>
+      </p:sp>
+      <p:sp>
+        <p:nvSpPr>
+          <p:cNvPr id="6" name="Rectangle 5">
+            <a:extLst>
+              <a:ext uri="{FF2B5EF4-FFF2-40B4-BE49-F238E27FC236}">
+                <a16:creationId xmlns:a16="http://schemas.microsoft.com/office/drawing/2014/main" id="{4A500CDA-6872-8B86-B4A8-ACAE338307F8}"/>
+              </a:ext>
+              <a:ext uri="{C183D7F6-B498-43B3-948B-1728B52AA6E4}">
+                <adec:decorative xmlns:adec="http://schemas.microsoft.com/office/drawing/2017/decorative" val="1"/>
+              </a:ext>
+            </a:extLst>
+          </p:cNvPr>
+          <p:cNvSpPr/>
+          <p:nvPr/>
+        </p:nvSpPr>
+        <p:spPr>
+          <a:xfrm>
+            <a:off x="38035326" y="3636815"/>
+            <a:ext cx="11593246" cy="29347573"/>
+          </a:xfrm>
+          <a:prstGeom prst="rect">
+            <a:avLst/>
+          </a:prstGeom>
+          <a:noFill/>
+          <a:ln w="193675">
+            <a:noFill/>
+          </a:ln>
+        </p:spPr>
+        <p:style>
+          <a:lnRef idx="2">
+            <a:schemeClr val="accent1">
+              <a:shade val="15000"/>
+            </a:schemeClr>
+          </a:lnRef>
+          <a:fillRef idx="1">
+            <a:schemeClr val="accent1"/>
+          </a:fillRef>
+          <a:effectRef idx="0">
+            <a:schemeClr val="accent1"/>
+          </a:effectRef>
+          <a:fontRef idx="minor">
+            <a:schemeClr val="lt1"/>
+          </a:fontRef>
+        </p:style>
+        <p:txBody>
+          <a:bodyPr rtlCol="0" anchor="ctr"/>
+          <a:lstStyle/>
+          <a:p>
+            <a:pPr algn="ctr"/>
+            <a:endParaRPr lang="en-US" dirty="0">
+              <a:solidFill>
+                <a:srgbClr val="D00000"/>
+              </a:solidFill>
+            </a:endParaRPr>
+          </a:p>
+        </p:txBody>
+      </p:sp>
+      <p:sp>
+        <p:nvSpPr>
+          <p:cNvPr id="17" name="Rectangle 16">
+            <a:extLst>
+              <a:ext uri="{FF2B5EF4-FFF2-40B4-BE49-F238E27FC236}">
+                <a16:creationId xmlns:a16="http://schemas.microsoft.com/office/drawing/2014/main" id="{4476F015-B7BA-317E-4148-3ABCC3DAA377}"/>
+              </a:ext>
+              <a:ext uri="{C183D7F6-B498-43B3-948B-1728B52AA6E4}">
+                <adec:decorative xmlns:adec="http://schemas.microsoft.com/office/drawing/2017/decorative" val="1"/>
+              </a:ext>
+            </a:extLst>
+          </p:cNvPr>
+          <p:cNvSpPr/>
+          <p:nvPr/>
+        </p:nvSpPr>
+        <p:spPr>
+          <a:xfrm>
+            <a:off x="-63300" y="0"/>
+            <a:ext cx="49440899" cy="33136789"/>
+          </a:xfrm>
+          <a:prstGeom prst="rect">
+            <a:avLst/>
+          </a:prstGeom>
+          <a:noFill/>
+          <a:ln w="193675">
+            <a:solidFill>
+              <a:srgbClr val="D00000"/>
+            </a:solidFill>
+          </a:ln>
+        </p:spPr>
+        <p:style>
+          <a:lnRef idx="2">
+            <a:schemeClr val="accent1">
+              <a:shade val="15000"/>
+            </a:schemeClr>
+          </a:lnRef>
+          <a:fillRef idx="1">
+            <a:schemeClr val="accent1"/>
+          </a:fillRef>
+          <a:effectRef idx="0">
+            <a:schemeClr val="accent1"/>
+          </a:effectRef>
+          <a:fontRef idx="minor">
+            <a:schemeClr val="lt1"/>
+          </a:fontRef>
+        </p:style>
+        <p:txBody>
+          <a:bodyPr rtlCol="0" anchor="ctr"/>
+          <a:lstStyle/>
+          <a:p>
+            <a:pPr algn="ctr"/>
+            <a:endParaRPr lang="en-US" dirty="0">
+              <a:solidFill>
+                <a:srgbClr val="D00000"/>
+              </a:solidFill>
+            </a:endParaRPr>
+          </a:p>
+        </p:txBody>
+      </p:sp>
+      <p:sp>
+        <p:nvSpPr>
+          <p:cNvPr id="25" name="Rectangle 24">
+            <a:extLst>
+              <a:ext uri="{FF2B5EF4-FFF2-40B4-BE49-F238E27FC236}">
+                <a16:creationId xmlns:a16="http://schemas.microsoft.com/office/drawing/2014/main" id="{EB7303A5-1D83-7E7F-D5F2-FB10B418201D}"/>
+              </a:ext>
+              <a:ext uri="{C183D7F6-B498-43B3-948B-1728B52AA6E4}">
+                <adec:decorative xmlns:adec="http://schemas.microsoft.com/office/drawing/2017/decorative" val="1"/>
+              </a:ext>
+            </a:extLst>
+          </p:cNvPr>
+          <p:cNvSpPr/>
+          <p:nvPr/>
+        </p:nvSpPr>
+        <p:spPr>
+          <a:xfrm>
+            <a:off x="99172" y="4509751"/>
+            <a:ext cx="11290619" cy="10623237"/>
+          </a:xfrm>
+          <a:prstGeom prst="rect">
+            <a:avLst/>
+          </a:prstGeom>
+          <a:noFill/>
+          <a:ln w="127000">
+            <a:solidFill>
+              <a:schemeClr val="tx1"/>
+            </a:solidFill>
+          </a:ln>
+        </p:spPr>
+        <p:style>
+          <a:lnRef idx="2">
+            <a:schemeClr val="accent1"/>
+          </a:lnRef>
+          <a:fillRef idx="1">
+            <a:schemeClr val="lt1"/>
+          </a:fillRef>
+          <a:effectRef idx="0">
+            <a:schemeClr val="accent1"/>
+          </a:effectRef>
+          <a:fontRef idx="minor">
+            <a:schemeClr val="dk1"/>
+          </a:fontRef>
+        </p:style>
+        <p:txBody>
+          <a:bodyPr rtlCol="0" anchor="ctr"/>
+          <a:lstStyle/>
+          <a:p>
+            <a:pPr algn="ctr"/>
+            <a:endParaRPr lang="en-US"/>
+          </a:p>
+        </p:txBody>
+      </p:sp>
+      <p:sp>
+        <p:nvSpPr>
+          <p:cNvPr id="27" name="Rectangle 26">
+            <a:extLst>
+              <a:ext uri="{FF2B5EF4-FFF2-40B4-BE49-F238E27FC236}">
+                <a16:creationId xmlns:a16="http://schemas.microsoft.com/office/drawing/2014/main" id="{DAD5089B-9E67-8847-099D-93B25F70D519}"/>
+              </a:ext>
+              <a:ext uri="{C183D7F6-B498-43B3-948B-1728B52AA6E4}">
+                <adec:decorative xmlns:adec="http://schemas.microsoft.com/office/drawing/2017/decorative" val="1"/>
+              </a:ext>
+            </a:extLst>
+          </p:cNvPr>
+          <p:cNvSpPr/>
+          <p:nvPr/>
+        </p:nvSpPr>
+        <p:spPr>
+          <a:xfrm>
+            <a:off x="105514" y="20544563"/>
+            <a:ext cx="11327260" cy="12282397"/>
+          </a:xfrm>
+          <a:prstGeom prst="rect">
+            <a:avLst/>
+          </a:prstGeom>
+          <a:noFill/>
+          <a:ln w="127000">
+            <a:solidFill>
+              <a:schemeClr val="tx1"/>
+            </a:solidFill>
+          </a:ln>
+        </p:spPr>
+        <p:style>
+          <a:lnRef idx="2">
+            <a:schemeClr val="accent1"/>
+          </a:lnRef>
+          <a:fillRef idx="1">
+            <a:schemeClr val="lt1"/>
+          </a:fillRef>
+          <a:effectRef idx="0">
+            <a:schemeClr val="accent1"/>
+          </a:effectRef>
+          <a:fontRef idx="minor">
+            <a:schemeClr val="dk1"/>
+          </a:fontRef>
+        </p:style>
+        <p:txBody>
+          <a:bodyPr rtlCol="0" anchor="ctr"/>
+          <a:lstStyle/>
+          <a:p>
+            <a:pPr algn="ctr"/>
+            <a:endParaRPr lang="en-US"/>
+          </a:p>
+        </p:txBody>
+      </p:sp>
+      <p:sp>
+        <p:nvSpPr>
+          <p:cNvPr id="28" name="Rectangle 27">
+            <a:extLst>
+              <a:ext uri="{FF2B5EF4-FFF2-40B4-BE49-F238E27FC236}">
+                <a16:creationId xmlns:a16="http://schemas.microsoft.com/office/drawing/2014/main" id="{ACCB9890-107A-50AC-8A62-236DDE5666A7}"/>
+              </a:ext>
+              <a:ext uri="{C183D7F6-B498-43B3-948B-1728B52AA6E4}">
+                <adec:decorative xmlns:adec="http://schemas.microsoft.com/office/drawing/2017/decorative" val="1"/>
+              </a:ext>
+            </a:extLst>
+          </p:cNvPr>
+          <p:cNvSpPr/>
+          <p:nvPr/>
+        </p:nvSpPr>
+        <p:spPr>
+          <a:xfrm>
+            <a:off x="38148434" y="22280301"/>
+            <a:ext cx="11095975" cy="10704087"/>
+          </a:xfrm>
+          <a:prstGeom prst="rect">
+            <a:avLst/>
+          </a:prstGeom>
+          <a:noFill/>
+          <a:ln w="127000">
+            <a:solidFill>
+              <a:schemeClr val="tx1"/>
+            </a:solidFill>
+          </a:ln>
+        </p:spPr>
+        <p:style>
+          <a:lnRef idx="2">
+            <a:schemeClr val="accent1"/>
+          </a:lnRef>
+          <a:fillRef idx="1">
+            <a:schemeClr val="lt1"/>
+          </a:fillRef>
+          <a:effectRef idx="0">
+            <a:schemeClr val="accent1"/>
+          </a:effectRef>
+          <a:fontRef idx="minor">
+            <a:schemeClr val="dk1"/>
+          </a:fontRef>
+        </p:style>
+        <p:txBody>
+          <a:bodyPr rtlCol="0" anchor="ctr"/>
+          <a:lstStyle/>
+          <a:p>
+            <a:pPr algn="ctr"/>
+            <a:endParaRPr lang="en-US"/>
+          </a:p>
+        </p:txBody>
+      </p:sp>
+      <p:sp>
+        <p:nvSpPr>
+          <p:cNvPr id="29" name="Rectangle 28">
+            <a:extLst>
+              <a:ext uri="{FF2B5EF4-FFF2-40B4-BE49-F238E27FC236}">
+                <a16:creationId xmlns:a16="http://schemas.microsoft.com/office/drawing/2014/main" id="{99A87BE6-C151-17FC-1E46-2CDCA5BCE917}"/>
+              </a:ext>
+              <a:ext uri="{C183D7F6-B498-43B3-948B-1728B52AA6E4}">
+                <adec:decorative xmlns:adec="http://schemas.microsoft.com/office/drawing/2017/decorative" val="1"/>
+              </a:ext>
+            </a:extLst>
+          </p:cNvPr>
+          <p:cNvSpPr/>
+          <p:nvPr/>
+        </p:nvSpPr>
+        <p:spPr>
+          <a:xfrm>
+            <a:off x="38156358" y="4395531"/>
+            <a:ext cx="11095975" cy="17126055"/>
+          </a:xfrm>
+          <a:prstGeom prst="rect">
+            <a:avLst/>
+          </a:prstGeom>
+          <a:noFill/>
+          <a:ln w="127000">
+            <a:solidFill>
+              <a:schemeClr val="tx1"/>
+            </a:solidFill>
+          </a:ln>
+        </p:spPr>
+        <p:style>
+          <a:lnRef idx="2">
+            <a:schemeClr val="accent1"/>
+          </a:lnRef>
+          <a:fillRef idx="1">
+            <a:schemeClr val="lt1"/>
+          </a:fillRef>
+          <a:effectRef idx="0">
+            <a:schemeClr val="accent1"/>
+          </a:effectRef>
+          <a:fontRef idx="minor">
+            <a:schemeClr val="dk1"/>
+          </a:fontRef>
+        </p:style>
+        <p:txBody>
+          <a:bodyPr rtlCol="0" anchor="ctr"/>
+          <a:lstStyle/>
+          <a:p>
+            <a:pPr algn="ctr"/>
+            <a:endParaRPr lang="en-US"/>
+          </a:p>
+        </p:txBody>
+      </p:sp>
+      <p:sp>
+        <p:nvSpPr>
+          <p:cNvPr id="31" name="Rectangle 30">
+            <a:extLst>
+              <a:ext uri="{FF2B5EF4-FFF2-40B4-BE49-F238E27FC236}">
+                <a16:creationId xmlns:a16="http://schemas.microsoft.com/office/drawing/2014/main" id="{69CAF7D0-A812-B6C7-FBF5-A06F0E96CCAF}"/>
+              </a:ext>
+              <a:ext uri="{C183D7F6-B498-43B3-948B-1728B52AA6E4}">
+                <adec:decorative xmlns:adec="http://schemas.microsoft.com/office/drawing/2017/decorative" val="1"/>
+              </a:ext>
+            </a:extLst>
+          </p:cNvPr>
+          <p:cNvSpPr/>
+          <p:nvPr/>
+        </p:nvSpPr>
+        <p:spPr>
+          <a:xfrm>
+            <a:off x="63116" y="15963003"/>
+            <a:ext cx="11323186" cy="3646510"/>
+          </a:xfrm>
+          <a:prstGeom prst="rect">
+            <a:avLst/>
+          </a:prstGeom>
+          <a:noFill/>
+          <a:ln w="127000">
+            <a:solidFill>
+              <a:schemeClr val="tx1"/>
+            </a:solidFill>
+          </a:ln>
+        </p:spPr>
+        <p:style>
+          <a:lnRef idx="2">
+            <a:schemeClr val="accent1"/>
+          </a:lnRef>
+          <a:fillRef idx="1">
+            <a:schemeClr val="lt1"/>
+          </a:fillRef>
+          <a:effectRef idx="0">
+            <a:schemeClr val="accent1"/>
+          </a:effectRef>
+          <a:fontRef idx="minor">
+            <a:schemeClr val="dk1"/>
+          </a:fontRef>
+        </p:style>
+        <p:txBody>
+          <a:bodyPr rtlCol="0" anchor="ctr"/>
+          <a:lstStyle/>
+          <a:p>
+            <a:pPr algn="ctr"/>
+            <a:endParaRPr lang="en-US"/>
+          </a:p>
+        </p:txBody>
+      </p:sp>
+      <p:sp>
+        <p:nvSpPr>
+          <p:cNvPr id="18" name="TextBox 17">
+            <a:extLst>
+              <a:ext uri="{FF2B5EF4-FFF2-40B4-BE49-F238E27FC236}">
+                <a16:creationId xmlns:a16="http://schemas.microsoft.com/office/drawing/2014/main" id="{BCF37902-2C8D-3049-9881-50CB35F2A6BA}"/>
+              </a:ext>
+            </a:extLst>
+          </p:cNvPr>
           <p:cNvSpPr txBox="1"/>
-          <p:nvPr/>
+          <p:nvPr>
+            <p:ph type="title"/>
+          </p:nvPr>
         </p:nvSpPr>
         <p:spPr>
           <a:xfrm>
@@ -3902,7 +4262,67 @@
       </p:sp>
       <p:pic>
         <p:nvPicPr>
-          <p:cNvPr id="9" name="Picture 8">
+          <p:cNvPr id="44" name="Picture 43" descr="University of Nebraska–Lincoln Law-Psychology Program logo.">
+            <a:extLst>
+              <a:ext uri="{FF2B5EF4-FFF2-40B4-BE49-F238E27FC236}">
+                <a16:creationId xmlns:a16="http://schemas.microsoft.com/office/drawing/2014/main" id="{4037FBE1-9ECA-C0D3-371B-B07926F454DC}"/>
+              </a:ext>
+            </a:extLst>
+          </p:cNvPr>
+          <p:cNvPicPr>
+            <a:picLocks noChangeAspect="1"/>
+          </p:cNvPicPr>
+          <p:nvPr/>
+        </p:nvPicPr>
+        <p:blipFill>
+          <a:blip r:embed="rId17"/>
+          <a:stretch>
+            <a:fillRect/>
+          </a:stretch>
+        </p:blipFill>
+        <p:spPr>
+          <a:xfrm>
+            <a:off x="47528445" y="31400847"/>
+            <a:ext cx="1311587" cy="1311587"/>
+          </a:xfrm>
+          <a:prstGeom prst="rect">
+            <a:avLst/>
+          </a:prstGeom>
+        </p:spPr>
+      </p:pic>
+      <p:pic>
+        <p:nvPicPr>
+          <p:cNvPr id="45" name="Picture 44" descr="University of Nebraska–Lincoln logo.">
+            <a:extLst>
+              <a:ext uri="{FF2B5EF4-FFF2-40B4-BE49-F238E27FC236}">
+                <a16:creationId xmlns:a16="http://schemas.microsoft.com/office/drawing/2014/main" id="{688D1896-15B4-5A0A-BB73-F35D286D43D5}"/>
+              </a:ext>
+            </a:extLst>
+          </p:cNvPr>
+          <p:cNvPicPr>
+            <a:picLocks noChangeAspect="1"/>
+          </p:cNvPicPr>
+          <p:nvPr/>
+        </p:nvPicPr>
+        <p:blipFill>
+          <a:blip r:embed="rId18"/>
+          <a:stretch>
+            <a:fillRect/>
+          </a:stretch>
+        </p:blipFill>
+        <p:spPr>
+          <a:xfrm>
+            <a:off x="342092" y="822956"/>
+            <a:ext cx="5908577" cy="1904417"/>
+          </a:xfrm>
+          <a:prstGeom prst="rect">
+            <a:avLst/>
+          </a:prstGeom>
+        </p:spPr>
+      </p:pic>
+      <p:pic>
+        <p:nvPicPr>
+          <p:cNvPr id="9" name="Picture 8" descr="Northeastern University logo.">
             <a:extLst>
               <a:ext uri="{FF2B5EF4-FFF2-40B4-BE49-F238E27FC236}">
                 <a16:creationId xmlns:a16="http://schemas.microsoft.com/office/drawing/2014/main" id="{B521A8F1-B8B2-5316-A94E-A5373C4D4747}"/>
@@ -3930,330 +4350,9 @@
           </a:prstGeom>
         </p:spPr>
       </p:pic>
-      <p:sp>
-        <p:nvSpPr>
-          <p:cNvPr id="37" name="TextBox 36">
-            <a:extLst>
-              <a:ext uri="{FF2B5EF4-FFF2-40B4-BE49-F238E27FC236}">
-                <a16:creationId xmlns:a16="http://schemas.microsoft.com/office/drawing/2014/main" id="{357C64D1-B11B-ED8F-6123-A05AE3728A6D}"/>
-              </a:ext>
-            </a:extLst>
-          </p:cNvPr>
-          <p:cNvSpPr txBox="1"/>
-          <p:nvPr/>
-        </p:nvSpPr>
-        <p:spPr>
-          <a:xfrm>
-            <a:off x="25936547" y="4339856"/>
-            <a:ext cx="11593246" cy="5940088"/>
-          </a:xfrm>
-          <a:prstGeom prst="rect">
-            <a:avLst/>
-          </a:prstGeom>
-          <a:noFill/>
-        </p:spPr>
-        <p:txBody>
-          <a:bodyPr wrap="square" rtlCol="0">
-            <a:spAutoFit/>
-          </a:bodyPr>
-          <a:lstStyle/>
-          <a:p>
-            <a:pPr algn="r"/>
-            <a:r>
-              <a:rPr lang="en-US" sz="9200" b="1" dirty="0">
-                <a:solidFill>
-                  <a:schemeClr val="accent4"/>
-                </a:solidFill>
-                <a:latin typeface="Atkinson Hyperlegible" pitchFamily="2" charset="77"/>
-                <a:cs typeface="Times New Roman" panose="02020603050405020304" pitchFamily="18" charset="0"/>
-              </a:rPr>
-              <a:t>79.8% </a:t>
-            </a:r>
-            <a:r>
-              <a:rPr lang="en-US" sz="7200" b="1" dirty="0">
-                <a:solidFill>
-                  <a:schemeClr val="bg2"/>
-                </a:solidFill>
-                <a:latin typeface="Atkinson Hyperlegible" pitchFamily="2" charset="77"/>
-                <a:cs typeface="Times New Roman" panose="02020603050405020304" pitchFamily="18" charset="0"/>
-              </a:rPr>
-              <a:t>of department 	policies (107 out of 134) 	included a </a:t>
-            </a:r>
-            <a:r>
-              <a:rPr lang="en-US" sz="7200" b="1" dirty="0">
-                <a:solidFill>
-                  <a:schemeClr val="accent4">
-                    <a:lumMod val="20000"/>
-                    <a:lumOff val="80000"/>
-                  </a:schemeClr>
-                </a:solidFill>
-                <a:latin typeface="Atkinson Hyperlegible" pitchFamily="2" charset="77"/>
-                <a:cs typeface="Times New Roman" panose="02020603050405020304" pitchFamily="18" charset="0"/>
-              </a:rPr>
-              <a:t>preference</a:t>
-            </a:r>
-            <a:r>
-              <a:rPr lang="en-US" sz="7200" b="1" dirty="0">
-                <a:solidFill>
-                  <a:schemeClr val="bg2"/>
-                </a:solidFill>
-                <a:latin typeface="Atkinson Hyperlegible" pitchFamily="2" charset="77"/>
-                <a:cs typeface="Times New Roman" panose="02020603050405020304" pitchFamily="18" charset="0"/>
-              </a:rPr>
-              <a:t> 	for </a:t>
-            </a:r>
-            <a:r>
-              <a:rPr lang="en-US" sz="7200" b="1" dirty="0">
-                <a:solidFill>
-                  <a:schemeClr val="accent4"/>
-                </a:solidFill>
-                <a:latin typeface="Atkinson Hyperlegible" pitchFamily="2" charset="77"/>
-                <a:cs typeface="Times New Roman" panose="02020603050405020304" pitchFamily="18" charset="0"/>
-              </a:rPr>
-              <a:t>written </a:t>
-            </a:r>
-            <a:r>
-              <a:rPr lang="en-US" sz="7200" b="1" dirty="0">
-                <a:solidFill>
-                  <a:schemeClr val="bg2"/>
-                </a:solidFill>
-                <a:latin typeface="Atkinson Hyperlegible" pitchFamily="2" charset="77"/>
-                <a:cs typeface="Times New Roman" panose="02020603050405020304" pitchFamily="18" charset="0"/>
-              </a:rPr>
-              <a:t>consent 	waivers…</a:t>
-            </a:r>
-          </a:p>
-        </p:txBody>
-      </p:sp>
-      <p:sp>
-        <p:nvSpPr>
-          <p:cNvPr id="34" name="TextBox 33">
-            <a:extLst>
-              <a:ext uri="{FF2B5EF4-FFF2-40B4-BE49-F238E27FC236}">
-                <a16:creationId xmlns:a16="http://schemas.microsoft.com/office/drawing/2014/main" id="{CAEDF038-3452-143A-433F-10ECCF58EF1E}"/>
-              </a:ext>
-            </a:extLst>
-          </p:cNvPr>
-          <p:cNvSpPr txBox="1"/>
-          <p:nvPr/>
-        </p:nvSpPr>
-        <p:spPr>
-          <a:xfrm>
-            <a:off x="12121014" y="12718441"/>
-            <a:ext cx="11593246" cy="7048083"/>
-          </a:xfrm>
-          <a:prstGeom prst="rect">
-            <a:avLst/>
-          </a:prstGeom>
-          <a:noFill/>
-        </p:spPr>
-        <p:txBody>
-          <a:bodyPr wrap="square" rtlCol="0">
-            <a:spAutoFit/>
-          </a:bodyPr>
-          <a:lstStyle/>
-          <a:p>
-            <a:r>
-              <a:rPr lang="en-US" sz="9200" b="1" dirty="0">
-                <a:solidFill>
-                  <a:schemeClr val="accent4"/>
-                </a:solidFill>
-                <a:latin typeface="Atkinson Hyperlegible" pitchFamily="2" charset="77"/>
-                <a:cs typeface="Times New Roman" panose="02020603050405020304" pitchFamily="18" charset="0"/>
-              </a:rPr>
-              <a:t>Waiver preference </a:t>
-            </a:r>
-            <a:r>
-              <a:rPr lang="en-US" sz="7200" b="1" dirty="0">
-                <a:solidFill>
-                  <a:schemeClr val="bg2"/>
-                </a:solidFill>
-                <a:latin typeface="Atkinson Hyperlegible" pitchFamily="2" charset="77"/>
-                <a:cs typeface="Times New Roman" panose="02020603050405020304" pitchFamily="18" charset="0"/>
-              </a:rPr>
-              <a:t>is </a:t>
-            </a:r>
-            <a:r>
-              <a:rPr lang="en-US" sz="7200" b="1" dirty="0">
-                <a:solidFill>
-                  <a:schemeClr val="accent4">
-                    <a:lumMod val="20000"/>
-                    <a:lumOff val="80000"/>
-                  </a:schemeClr>
-                </a:solidFill>
-                <a:latin typeface="Atkinson Hyperlegible" pitchFamily="2" charset="77"/>
-                <a:cs typeface="Times New Roman" panose="02020603050405020304" pitchFamily="18" charset="0"/>
-              </a:rPr>
-              <a:t>negatively</a:t>
-            </a:r>
-            <a:r>
-              <a:rPr lang="en-US" sz="7200" b="1" dirty="0">
-                <a:solidFill>
-                  <a:schemeClr val="bg2"/>
-                </a:solidFill>
-                <a:latin typeface="Atkinson Hyperlegible" pitchFamily="2" charset="77"/>
-                <a:cs typeface="Times New Roman" panose="02020603050405020304" pitchFamily="18" charset="0"/>
-              </a:rPr>
-              <a:t> associated with median </a:t>
-            </a:r>
-            <a:r>
-              <a:rPr lang="en-US" sz="7200" b="1" dirty="0">
-                <a:solidFill>
-                  <a:schemeClr val="accent4"/>
-                </a:solidFill>
-                <a:latin typeface="Atkinson Hyperlegible" pitchFamily="2" charset="77"/>
-                <a:cs typeface="Times New Roman" panose="02020603050405020304" pitchFamily="18" charset="0"/>
-              </a:rPr>
-              <a:t>age</a:t>
-            </a:r>
-            <a:r>
-              <a:rPr lang="en-US" sz="7200" b="1" dirty="0">
-                <a:solidFill>
-                  <a:srgbClr val="D00000"/>
-                </a:solidFill>
-                <a:latin typeface="Atkinson Hyperlegible" pitchFamily="2" charset="77"/>
-                <a:cs typeface="Times New Roman" panose="02020603050405020304" pitchFamily="18" charset="0"/>
-              </a:rPr>
-              <a:t> </a:t>
-            </a:r>
-            <a:r>
-              <a:rPr lang="en-US" sz="7200" b="1" dirty="0">
-                <a:solidFill>
-                  <a:schemeClr val="bg2"/>
-                </a:solidFill>
-                <a:latin typeface="Atkinson Hyperlegible" pitchFamily="2" charset="77"/>
-                <a:cs typeface="Times New Roman" panose="02020603050405020304" pitchFamily="18" charset="0"/>
-              </a:rPr>
-              <a:t>but not median</a:t>
-            </a:r>
-            <a:r>
-              <a:rPr lang="en-US" sz="7200" b="1" dirty="0">
-                <a:solidFill>
-                  <a:schemeClr val="accent4"/>
-                </a:solidFill>
-                <a:latin typeface="Atkinson Hyperlegible" pitchFamily="2" charset="77"/>
-                <a:cs typeface="Times New Roman" panose="02020603050405020304" pitchFamily="18" charset="0"/>
-              </a:rPr>
-              <a:t> income </a:t>
-            </a:r>
-            <a:r>
-              <a:rPr lang="en-US" sz="7200" b="1" dirty="0">
-                <a:solidFill>
-                  <a:schemeClr val="bg2"/>
-                </a:solidFill>
-                <a:latin typeface="Atkinson Hyperlegible" pitchFamily="2" charset="77"/>
-                <a:cs typeface="Times New Roman" panose="02020603050405020304" pitchFamily="18" charset="0"/>
-              </a:rPr>
-              <a:t>or the percentage of 	</a:t>
-            </a:r>
-          </a:p>
-          <a:p>
-            <a:r>
-              <a:rPr lang="en-US" sz="7200" b="1" dirty="0">
-                <a:solidFill>
-                  <a:schemeClr val="accent4"/>
-                </a:solidFill>
-                <a:latin typeface="Atkinson Hyperlegible" pitchFamily="2" charset="77"/>
-                <a:cs typeface="Times New Roman" panose="02020603050405020304" pitchFamily="18" charset="0"/>
-              </a:rPr>
-              <a:t>Black residents</a:t>
-            </a:r>
-            <a:r>
-              <a:rPr lang="en-US" sz="7200" b="1" dirty="0">
-                <a:solidFill>
-                  <a:schemeClr val="bg2"/>
-                </a:solidFill>
-                <a:latin typeface="Atkinson Hyperlegible" pitchFamily="2" charset="77"/>
-                <a:cs typeface="Times New Roman" panose="02020603050405020304" pitchFamily="18" charset="0"/>
-              </a:rPr>
-              <a:t>…</a:t>
-            </a:r>
-          </a:p>
-        </p:txBody>
-      </p:sp>
-      <p:sp>
-        <p:nvSpPr>
-          <p:cNvPr id="36" name="TextBox 35">
-            <a:extLst>
-              <a:ext uri="{FF2B5EF4-FFF2-40B4-BE49-F238E27FC236}">
-                <a16:creationId xmlns:a16="http://schemas.microsoft.com/office/drawing/2014/main" id="{B6BDDB25-C0B3-B878-857E-9AF1DB3C9A82}"/>
-              </a:ext>
-            </a:extLst>
-          </p:cNvPr>
-          <p:cNvSpPr txBox="1"/>
-          <p:nvPr/>
-        </p:nvSpPr>
-        <p:spPr>
-          <a:xfrm>
-            <a:off x="38330923" y="31152059"/>
-            <a:ext cx="8891634" cy="1603003"/>
-          </a:xfrm>
-          <a:prstGeom prst="rect">
-            <a:avLst/>
-          </a:prstGeom>
-          <a:noFill/>
-        </p:spPr>
-        <p:txBody>
-          <a:bodyPr wrap="square">
-            <a:spAutoFit/>
-          </a:bodyPr>
-          <a:lstStyle/>
-          <a:p>
-            <a:pPr>
-              <a:lnSpc>
-                <a:spcPts val="4740"/>
-              </a:lnSpc>
-              <a:spcBef>
-                <a:spcPts val="0"/>
-              </a:spcBef>
-              <a:spcAft>
-                <a:spcPts val="600"/>
-              </a:spcAft>
-              <a:defRPr/>
-            </a:pPr>
-            <a:r>
-              <a:rPr lang="en-US" altLang="en-US" sz="3200" dirty="0">
-                <a:solidFill>
-                  <a:srgbClr val="D00000"/>
-                </a:solidFill>
-                <a:latin typeface="Atkinson Hyperlegible" pitchFamily="2" charset="77"/>
-                <a:ea typeface="ＭＳ Ｐゴシック" panose="020B0600070205080204" pitchFamily="34" charset="-128"/>
-                <a:cs typeface="Times New Roman" panose="02020603050405020304" pitchFamily="18" charset="0"/>
-              </a:rPr>
-              <a:t>Acknowledgements</a:t>
-            </a:r>
-          </a:p>
-          <a:p>
-            <a:pPr>
-              <a:spcBef>
-                <a:spcPts val="0"/>
-              </a:spcBef>
-              <a:defRPr/>
-            </a:pPr>
-            <a:r>
-              <a:rPr lang="en-US" altLang="en-US" sz="1800" dirty="0">
-                <a:solidFill>
-                  <a:srgbClr val="000000"/>
-                </a:solidFill>
-                <a:latin typeface="Atkinson Hyperlegible" pitchFamily="2" charset="77"/>
-                <a:cs typeface="Times New Roman" panose="02020603050405020304" pitchFamily="18" charset="0"/>
-              </a:rPr>
-              <a:t>We would like to thank the Law and Policy Lab at the University of Nebraska-Lincoln for their support, guidance, and work on this project. We would also like to thank the municipal Massachusetts police departments for their cooperation.</a:t>
-            </a:r>
-            <a:endParaRPr lang="en-US" altLang="en-US" sz="1800" dirty="0">
-              <a:solidFill>
-                <a:srgbClr val="C00000"/>
-              </a:solidFill>
-              <a:latin typeface="Atkinson Hyperlegible" pitchFamily="2" charset="77"/>
-              <a:ea typeface="ＭＳ Ｐゴシック" panose="020B0600070205080204" pitchFamily="34" charset="-128"/>
-              <a:cs typeface="Times New Roman" panose="02020603050405020304" pitchFamily="18" charset="0"/>
-            </a:endParaRPr>
-          </a:p>
-        </p:txBody>
-      </p:sp>
       <p:pic>
         <p:nvPicPr>
-          <p:cNvPr id="40" name="Picture 12" descr="http://media.glassdoor.com/sqll/26997/scripps-college-squarelogo.png">
+          <p:cNvPr id="40" name="Picture 12" descr="Scripps College logo.">
             <a:extLst>
               <a:ext uri="{FF2B5EF4-FFF2-40B4-BE49-F238E27FC236}">
                 <a16:creationId xmlns:a16="http://schemas.microsoft.com/office/drawing/2014/main" id="{469BA007-C2FC-146D-B882-B2CAE8428390}"/>
@@ -4660,10 +4759,10 @@
       </p:sp>
       <p:sp>
         <p:nvSpPr>
-          <p:cNvPr id="56" name="TextBox 55">
+          <p:cNvPr id="3" name="TextBox 2">
             <a:extLst>
               <a:ext uri="{FF2B5EF4-FFF2-40B4-BE49-F238E27FC236}">
-                <a16:creationId xmlns:a16="http://schemas.microsoft.com/office/drawing/2014/main" id="{2032D67F-B1AA-C1F6-4186-F5D9F77DEA27}"/>
+                <a16:creationId xmlns:a16="http://schemas.microsoft.com/office/drawing/2014/main" id="{8E35B311-3C19-412C-ADE6-EB2E4158F366}"/>
               </a:ext>
             </a:extLst>
           </p:cNvPr>
@@ -4672,8 +4771,8 @@
         </p:nvSpPr>
         <p:spPr>
           <a:xfrm>
-            <a:off x="119992" y="20636003"/>
-            <a:ext cx="11455535" cy="1794466"/>
+            <a:off x="389717" y="16100100"/>
+            <a:ext cx="10875349" cy="3704925"/>
           </a:xfrm>
           <a:prstGeom prst="rect">
             <a:avLst/>
@@ -4681,73 +4780,70 @@
           <a:noFill/>
         </p:spPr>
         <p:txBody>
-          <a:bodyPr wrap="square">
+          <a:bodyPr wrap="square" rtlCol="0">
             <a:spAutoFit/>
           </a:bodyPr>
           <a:lstStyle/>
           <a:p>
-            <a:pPr eaLnBrk="1" hangingPunct="1">
+            <a:pPr marL="514350" indent="-514350">
               <a:lnSpc>
-                <a:spcPts val="4456"/>
+                <a:spcPts val="4690"/>
               </a:lnSpc>
               <a:spcBef>
-                <a:spcPct val="20000"/>
+                <a:spcPts val="135"/>
               </a:spcBef>
+              <a:spcAft>
+                <a:spcPts val="135"/>
+              </a:spcAft>
+              <a:buFont typeface="+mj-lt"/>
+              <a:buAutoNum type="arabicPeriod"/>
               <a:defRPr/>
             </a:pPr>
             <a:r>
               <a:rPr lang="en-US" altLang="en-US" sz="3200" dirty="0">
-                <a:solidFill>
-                  <a:srgbClr val="D00000"/>
-                </a:solidFill>
-                <a:latin typeface="Atkinson Hyperlegible" pitchFamily="2" charset="77"/>
-                <a:ea typeface="ＭＳ Ｐゴシック" panose="020B0600070205080204" pitchFamily="34" charset="-128"/>
+                <a:latin typeface="DM Sans 14pt" pitchFamily="2" charset="77"/>
                 <a:cs typeface="Times New Roman" panose="02020603050405020304" pitchFamily="18" charset="0"/>
               </a:rPr>
-              <a:t>Archival Analysis: </a:t>
-            </a:r>
+              <a:t>How many Massachusetts (MA) departments prefer written consent over verbal consent? </a:t>
+            </a:r>
+          </a:p>
+          <a:p>
+            <a:pPr marL="514350" indent="-514350">
+              <a:lnSpc>
+                <a:spcPts val="4690"/>
+              </a:lnSpc>
+              <a:spcBef>
+                <a:spcPts val="135"/>
+              </a:spcBef>
+              <a:spcAft>
+                <a:spcPts val="135"/>
+              </a:spcAft>
+              <a:buFont typeface="+mj-lt"/>
+              <a:buAutoNum type="arabicPeriod"/>
+              <a:defRPr/>
+            </a:pPr>
             <a:r>
               <a:rPr lang="en-US" altLang="en-US" sz="3200" dirty="0">
-                <a:latin typeface="Atkinson Hyperlegible" pitchFamily="2" charset="77"/>
-                <a:ea typeface="ＭＳ Ｐゴシック" panose="020B0600070205080204" pitchFamily="34" charset="-128"/>
+                <a:latin typeface="DM Sans 14pt" pitchFamily="2" charset="77"/>
                 <a:cs typeface="Times New Roman" panose="02020603050405020304" pitchFamily="18" charset="0"/>
               </a:rPr>
-              <a:t>Reviewed (</a:t>
-            </a:r>
-            <a:r>
-              <a:rPr lang="en-US" altLang="en-US" sz="3200" i="1" dirty="0">
-                <a:latin typeface="Atkinson Hyperlegible" pitchFamily="2" charset="77"/>
-                <a:ea typeface="ＭＳ Ｐゴシック" panose="020B0600070205080204" pitchFamily="34" charset="-128"/>
-                <a:cs typeface="Times New Roman" panose="02020603050405020304" pitchFamily="18" charset="0"/>
-              </a:rPr>
-              <a:t>N </a:t>
-            </a:r>
-            <a:r>
-              <a:rPr lang="en-US" altLang="en-US" sz="3200" dirty="0">
-                <a:latin typeface="Atkinson Hyperlegible" pitchFamily="2" charset="77"/>
-                <a:ea typeface="ＭＳ Ｐゴシック" panose="020B0600070205080204" pitchFamily="34" charset="-128"/>
-                <a:cs typeface="Times New Roman" panose="02020603050405020304" pitchFamily="18" charset="0"/>
-              </a:rPr>
-              <a:t>= 344) Massachusetts</a:t>
-            </a:r>
-            <a:r>
-              <a:rPr lang="en-US" altLang="en-US" sz="3200" i="1" dirty="0">
-                <a:latin typeface="Atkinson Hyperlegible" pitchFamily="2" charset="77"/>
-                <a:ea typeface="ＭＳ Ｐゴシック" panose="020B0600070205080204" pitchFamily="34" charset="-128"/>
-                <a:cs typeface="Times New Roman" panose="02020603050405020304" pitchFamily="18" charset="0"/>
-              </a:rPr>
-              <a:t>’ </a:t>
-            </a:r>
-            <a:r>
-              <a:rPr lang="en-US" altLang="en-US" sz="3200" dirty="0">
-                <a:latin typeface="Atkinson Hyperlegible" pitchFamily="2" charset="77"/>
-                <a:ea typeface="ＭＳ Ｐゴシック" panose="020B0600070205080204" pitchFamily="34" charset="-128"/>
-                <a:cs typeface="Times New Roman" panose="02020603050405020304" pitchFamily="18" charset="0"/>
-              </a:rPr>
-              <a:t>municipal police departments websites for Search &amp; Seizure Policies</a:t>
-            </a:r>
-            <a:endParaRPr lang="en-US" dirty="0">
-              <a:latin typeface="Atkinson Hyperlegible" pitchFamily="2" charset="77"/>
+              <a:t>Do local demographics predict whether a municipal police department in MA has adopted a written waiver preference? </a:t>
+            </a:r>
+            <a:endParaRPr lang="en-US" sz="3200" b="1" dirty="0">
+              <a:latin typeface="DM Sans 14pt" pitchFamily="2" charset="77"/>
+              <a:cs typeface="Arial" panose="020B0604020202020204" pitchFamily="34" charset="0"/>
+            </a:endParaRPr>
+          </a:p>
+          <a:p>
+            <a:pPr>
+              <a:lnSpc>
+                <a:spcPct val="120000"/>
+              </a:lnSpc>
+            </a:pPr>
+            <a:endParaRPr lang="en-US" sz="3200" dirty="0">
+              <a:latin typeface="DM Sans 14pt" pitchFamily="2" charset="77"/>
+              <a:ea typeface="Georgia" panose="02040502050405020303" pitchFamily="18" charset="0"/>
+              <a:cs typeface="Times New Roman" panose="02020603050405020304" pitchFamily="18" charset="0"/>
             </a:endParaRPr>
           </a:p>
         </p:txBody>
@@ -4817,9 +4913,167 @@
           </a:p>
         </p:txBody>
       </p:sp>
+      <p:sp>
+        <p:nvSpPr>
+          <p:cNvPr id="56" name="TextBox 55">
+            <a:extLst>
+              <a:ext uri="{FF2B5EF4-FFF2-40B4-BE49-F238E27FC236}">
+                <a16:creationId xmlns:a16="http://schemas.microsoft.com/office/drawing/2014/main" id="{2032D67F-B1AA-C1F6-4186-F5D9F77DEA27}"/>
+              </a:ext>
+            </a:extLst>
+          </p:cNvPr>
+          <p:cNvSpPr txBox="1"/>
+          <p:nvPr/>
+        </p:nvSpPr>
+        <p:spPr>
+          <a:xfrm>
+            <a:off x="119992" y="20636003"/>
+            <a:ext cx="11455535" cy="1794466"/>
+          </a:xfrm>
+          <a:prstGeom prst="rect">
+            <a:avLst/>
+          </a:prstGeom>
+          <a:noFill/>
+        </p:spPr>
+        <p:txBody>
+          <a:bodyPr wrap="square">
+            <a:spAutoFit/>
+          </a:bodyPr>
+          <a:lstStyle/>
+          <a:p>
+            <a:pPr eaLnBrk="1" hangingPunct="1">
+              <a:lnSpc>
+                <a:spcPts val="4456"/>
+              </a:lnSpc>
+              <a:spcBef>
+                <a:spcPct val="20000"/>
+              </a:spcBef>
+              <a:defRPr/>
+            </a:pPr>
+            <a:r>
+              <a:rPr lang="en-US" altLang="en-US" sz="3200" dirty="0">
+                <a:solidFill>
+                  <a:srgbClr val="D00000"/>
+                </a:solidFill>
+                <a:latin typeface="Atkinson Hyperlegible" pitchFamily="2" charset="77"/>
+                <a:ea typeface="ＭＳ Ｐゴシック" panose="020B0600070205080204" pitchFamily="34" charset="-128"/>
+                <a:cs typeface="Times New Roman" panose="02020603050405020304" pitchFamily="18" charset="0"/>
+              </a:rPr>
+              <a:t>Archival Analysis: </a:t>
+            </a:r>
+            <a:r>
+              <a:rPr lang="en-US" altLang="en-US" sz="3200" dirty="0">
+                <a:latin typeface="Atkinson Hyperlegible" pitchFamily="2" charset="77"/>
+                <a:ea typeface="ＭＳ Ｐゴシック" panose="020B0600070205080204" pitchFamily="34" charset="-128"/>
+                <a:cs typeface="Times New Roman" panose="02020603050405020304" pitchFamily="18" charset="0"/>
+              </a:rPr>
+              <a:t>Reviewed (</a:t>
+            </a:r>
+            <a:r>
+              <a:rPr lang="en-US" altLang="en-US" sz="3200" i="1" dirty="0">
+                <a:latin typeface="Atkinson Hyperlegible" pitchFamily="2" charset="77"/>
+                <a:ea typeface="ＭＳ Ｐゴシック" panose="020B0600070205080204" pitchFamily="34" charset="-128"/>
+                <a:cs typeface="Times New Roman" panose="02020603050405020304" pitchFamily="18" charset="0"/>
+              </a:rPr>
+              <a:t>N </a:t>
+            </a:r>
+            <a:r>
+              <a:rPr lang="en-US" altLang="en-US" sz="3200" dirty="0">
+                <a:latin typeface="Atkinson Hyperlegible" pitchFamily="2" charset="77"/>
+                <a:ea typeface="ＭＳ Ｐゴシック" panose="020B0600070205080204" pitchFamily="34" charset="-128"/>
+                <a:cs typeface="Times New Roman" panose="02020603050405020304" pitchFamily="18" charset="0"/>
+              </a:rPr>
+              <a:t>= 344) Massachusetts</a:t>
+            </a:r>
+            <a:r>
+              <a:rPr lang="en-US" altLang="en-US" sz="3200" i="1" dirty="0">
+                <a:latin typeface="Atkinson Hyperlegible" pitchFamily="2" charset="77"/>
+                <a:ea typeface="ＭＳ Ｐゴシック" panose="020B0600070205080204" pitchFamily="34" charset="-128"/>
+                <a:cs typeface="Times New Roman" panose="02020603050405020304" pitchFamily="18" charset="0"/>
+              </a:rPr>
+              <a:t>’ </a:t>
+            </a:r>
+            <a:r>
+              <a:rPr lang="en-US" altLang="en-US" sz="3200" dirty="0">
+                <a:latin typeface="Atkinson Hyperlegible" pitchFamily="2" charset="77"/>
+                <a:ea typeface="ＭＳ Ｐゴシック" panose="020B0600070205080204" pitchFamily="34" charset="-128"/>
+                <a:cs typeface="Times New Roman" panose="02020603050405020304" pitchFamily="18" charset="0"/>
+              </a:rPr>
+              <a:t>municipal police departments websites for Search &amp; Seizure Policies</a:t>
+            </a:r>
+            <a:endParaRPr lang="en-US" dirty="0">
+              <a:latin typeface="Atkinson Hyperlegible" pitchFamily="2" charset="77"/>
+            </a:endParaRPr>
+          </a:p>
+        </p:txBody>
+      </p:sp>
+      <p:sp>
+        <p:nvSpPr>
+          <p:cNvPr id="63" name="TextBox 62">
+            <a:extLst>
+              <a:ext uri="{FF2B5EF4-FFF2-40B4-BE49-F238E27FC236}">
+                <a16:creationId xmlns:a16="http://schemas.microsoft.com/office/drawing/2014/main" id="{2D638D50-58C8-63AE-82AC-54DD07E2645D}"/>
+              </a:ext>
+            </a:extLst>
+          </p:cNvPr>
+          <p:cNvSpPr txBox="1"/>
+          <p:nvPr/>
+        </p:nvSpPr>
+        <p:spPr>
+          <a:xfrm>
+            <a:off x="311534" y="22543983"/>
+            <a:ext cx="11223656" cy="642420"/>
+          </a:xfrm>
+          <a:prstGeom prst="rect">
+            <a:avLst/>
+          </a:prstGeom>
+          <a:noFill/>
+        </p:spPr>
+        <p:txBody>
+          <a:bodyPr wrap="square">
+            <a:spAutoFit/>
+          </a:bodyPr>
+          <a:lstStyle/>
+          <a:p>
+            <a:pPr>
+              <a:lnSpc>
+                <a:spcPts val="4456"/>
+              </a:lnSpc>
+              <a:spcBef>
+                <a:spcPct val="20000"/>
+              </a:spcBef>
+              <a:defRPr/>
+            </a:pPr>
+            <a:r>
+              <a:rPr lang="en-US" altLang="en-US" sz="3200" dirty="0">
+                <a:latin typeface="Atkinson Hyperlegible" pitchFamily="2" charset="77"/>
+                <a:ea typeface="ＭＳ Ｐゴシック" panose="020B0600070205080204" pitchFamily="34" charset="-128"/>
+                <a:cs typeface="Times New Roman" panose="02020603050405020304" pitchFamily="18" charset="0"/>
+              </a:rPr>
+              <a:t>Located policies for 38.95% (</a:t>
+            </a:r>
+            <a:r>
+              <a:rPr lang="en-US" altLang="en-US" sz="3200" i="1" dirty="0">
+                <a:latin typeface="Atkinson Hyperlegible" pitchFamily="2" charset="77"/>
+                <a:ea typeface="ＭＳ Ｐゴシック" panose="020B0600070205080204" pitchFamily="34" charset="-128"/>
+                <a:cs typeface="Times New Roman" panose="02020603050405020304" pitchFamily="18" charset="0"/>
+              </a:rPr>
+              <a:t>n</a:t>
+            </a:r>
+            <a:r>
+              <a:rPr lang="en-US" altLang="en-US" sz="3200" dirty="0">
+                <a:latin typeface="Atkinson Hyperlegible" pitchFamily="2" charset="77"/>
+                <a:ea typeface="ＭＳ Ｐゴシック" panose="020B0600070205080204" pitchFamily="34" charset="-128"/>
+                <a:cs typeface="Times New Roman" panose="02020603050405020304" pitchFamily="18" charset="0"/>
+              </a:rPr>
+              <a:t> = 134) of departments</a:t>
+            </a:r>
+          </a:p>
+        </p:txBody>
+      </p:sp>
       <p:pic>
         <p:nvPicPr>
-          <p:cNvPr id="59" name="Picture 58" descr="A test sheet with cars and question marks&#10;&#10;Description automatically generated">
+          <p:cNvPr id="59" name="Picture 58" descr="Policy-availability pictogram. Search and seizure policies were located for 134 of the 344 Massachusetts municipal police departments reviewed (38.95%). Question marks represent departments whose policies were not located.">
             <a:extLst>
               <a:ext uri="{FF2B5EF4-FFF2-40B4-BE49-F238E27FC236}">
                 <a16:creationId xmlns:a16="http://schemas.microsoft.com/office/drawing/2014/main" id="{55F9A63B-E7E0-A6B4-A060-51D3FADB8043}"/>
@@ -4855,134 +5109,6 @@
       </p:pic>
       <p:sp>
         <p:nvSpPr>
-          <p:cNvPr id="61" name="TextBox 60">
-            <a:extLst>
-              <a:ext uri="{FF2B5EF4-FFF2-40B4-BE49-F238E27FC236}">
-                <a16:creationId xmlns:a16="http://schemas.microsoft.com/office/drawing/2014/main" id="{BFBC2080-1071-CF6E-796B-62AB4D4DB2FA}"/>
-              </a:ext>
-            </a:extLst>
-          </p:cNvPr>
-          <p:cNvSpPr txBox="1"/>
-          <p:nvPr/>
-        </p:nvSpPr>
-        <p:spPr>
-          <a:xfrm>
-            <a:off x="38468956" y="5232820"/>
-            <a:ext cx="10808640" cy="1219501"/>
-          </a:xfrm>
-          <a:prstGeom prst="rect">
-            <a:avLst/>
-          </a:prstGeom>
-          <a:noFill/>
-        </p:spPr>
-        <p:txBody>
-          <a:bodyPr wrap="square">
-            <a:spAutoFit/>
-          </a:bodyPr>
-          <a:lstStyle/>
-          <a:p>
-            <a:pPr eaLnBrk="1" hangingPunct="1">
-              <a:lnSpc>
-                <a:spcPts val="4456"/>
-              </a:lnSpc>
-              <a:spcBef>
-                <a:spcPct val="20000"/>
-              </a:spcBef>
-              <a:defRPr/>
-            </a:pPr>
-            <a:r>
-              <a:rPr lang="en-US" altLang="en-US" sz="3200" dirty="0">
-                <a:solidFill>
-                  <a:srgbClr val="D00000"/>
-                </a:solidFill>
-                <a:latin typeface="Atkinson Hyperlegible" pitchFamily="2" charset="77"/>
-                <a:ea typeface="ＭＳ Ｐゴシック" panose="020B0600070205080204" pitchFamily="34" charset="-128"/>
-                <a:cs typeface="Times New Roman" panose="02020603050405020304" pitchFamily="18" charset="0"/>
-              </a:rPr>
-              <a:t>Waiver Preference in Policy: </a:t>
-            </a:r>
-            <a:r>
-              <a:rPr lang="en-US" altLang="en-US" sz="3200" dirty="0">
-                <a:latin typeface="Atkinson Hyperlegible" pitchFamily="2" charset="77"/>
-                <a:ea typeface="ＭＳ Ｐゴシック" panose="020B0600070205080204" pitchFamily="34" charset="-128"/>
-                <a:cs typeface="Times New Roman" panose="02020603050405020304" pitchFamily="18" charset="0"/>
-              </a:rPr>
-              <a:t>Coded each departmental policy for inclusion of Written Consent Preference</a:t>
-            </a:r>
-            <a:endParaRPr lang="en-US" sz="3200" dirty="0">
-              <a:latin typeface="Atkinson Hyperlegible" pitchFamily="2" charset="77"/>
-              <a:ea typeface="Georgia" panose="02040502050405020303" pitchFamily="18" charset="0"/>
-              <a:cs typeface="Times New Roman" panose="02020603050405020304" pitchFamily="18" charset="0"/>
-            </a:endParaRPr>
-          </a:p>
-        </p:txBody>
-      </p:sp>
-      <p:sp>
-        <p:nvSpPr>
-          <p:cNvPr id="63" name="TextBox 62">
-            <a:extLst>
-              <a:ext uri="{FF2B5EF4-FFF2-40B4-BE49-F238E27FC236}">
-                <a16:creationId xmlns:a16="http://schemas.microsoft.com/office/drawing/2014/main" id="{2D638D50-58C8-63AE-82AC-54DD07E2645D}"/>
-              </a:ext>
-            </a:extLst>
-          </p:cNvPr>
-          <p:cNvSpPr txBox="1"/>
-          <p:nvPr/>
-        </p:nvSpPr>
-        <p:spPr>
-          <a:xfrm>
-            <a:off x="311534" y="22543983"/>
-            <a:ext cx="11223656" cy="642420"/>
-          </a:xfrm>
-          <a:prstGeom prst="rect">
-            <a:avLst/>
-          </a:prstGeom>
-          <a:noFill/>
-        </p:spPr>
-        <p:txBody>
-          <a:bodyPr wrap="square">
-            <a:spAutoFit/>
-          </a:bodyPr>
-          <a:lstStyle/>
-          <a:p>
-            <a:pPr>
-              <a:lnSpc>
-                <a:spcPts val="4456"/>
-              </a:lnSpc>
-              <a:spcBef>
-                <a:spcPct val="20000"/>
-              </a:spcBef>
-              <a:defRPr/>
-            </a:pPr>
-            <a:r>
-              <a:rPr lang="en-US" altLang="en-US" sz="3200" dirty="0">
-                <a:latin typeface="Atkinson Hyperlegible" pitchFamily="2" charset="77"/>
-                <a:ea typeface="ＭＳ Ｐゴシック" panose="020B0600070205080204" pitchFamily="34" charset="-128"/>
-                <a:cs typeface="Times New Roman" panose="02020603050405020304" pitchFamily="18" charset="0"/>
-              </a:rPr>
-              <a:t>Located policies for 38.95% (</a:t>
-            </a:r>
-            <a:r>
-              <a:rPr lang="en-US" altLang="en-US" sz="3200" i="1" dirty="0">
-                <a:latin typeface="Atkinson Hyperlegible" pitchFamily="2" charset="77"/>
-                <a:ea typeface="ＭＳ Ｐゴシック" panose="020B0600070205080204" pitchFamily="34" charset="-128"/>
-                <a:cs typeface="Times New Roman" panose="02020603050405020304" pitchFamily="18" charset="0"/>
-              </a:rPr>
-              <a:t>n</a:t>
-            </a:r>
-            <a:r>
-              <a:rPr lang="en-US" altLang="en-US" sz="3200" dirty="0">
-                <a:latin typeface="Atkinson Hyperlegible" pitchFamily="2" charset="77"/>
-                <a:ea typeface="ＭＳ Ｐゴシック" panose="020B0600070205080204" pitchFamily="34" charset="-128"/>
-                <a:cs typeface="Times New Roman" panose="02020603050405020304" pitchFamily="18" charset="0"/>
-              </a:rPr>
-              <a:t> = 134) of departments</a:t>
-            </a:r>
-          </a:p>
-        </p:txBody>
-      </p:sp>
-      <p:sp>
-        <p:nvSpPr>
           <p:cNvPr id="65" name="TextBox 64">
             <a:extLst>
               <a:ext uri="{FF2B5EF4-FFF2-40B4-BE49-F238E27FC236}">
@@ -5034,6 +5160,111 @@
               </a:rPr>
               <a:t>, we contacted and requested the policy directly</a:t>
             </a:r>
+          </a:p>
+        </p:txBody>
+      </p:sp>
+      <p:sp>
+        <p:nvSpPr>
+          <p:cNvPr id="82" name="TextBox 81">
+            <a:extLst>
+              <a:ext uri="{FF2B5EF4-FFF2-40B4-BE49-F238E27FC236}">
+                <a16:creationId xmlns:a16="http://schemas.microsoft.com/office/drawing/2014/main" id="{531715C0-F76E-B6D9-6232-D7C83B44CD08}"/>
+              </a:ext>
+            </a:extLst>
+          </p:cNvPr>
+          <p:cNvSpPr txBox="1"/>
+          <p:nvPr/>
+        </p:nvSpPr>
+        <p:spPr>
+          <a:xfrm>
+            <a:off x="129183" y="30429844"/>
+            <a:ext cx="11437151" cy="2554545"/>
+          </a:xfrm>
+          <a:prstGeom prst="rect">
+            <a:avLst/>
+          </a:prstGeom>
+          <a:noFill/>
+        </p:spPr>
+        <p:txBody>
+          <a:bodyPr wrap="square">
+            <a:spAutoFit/>
+          </a:bodyPr>
+          <a:lstStyle/>
+          <a:p>
+            <a:r>
+              <a:rPr lang="en-US" altLang="en-US" sz="3200" dirty="0">
+                <a:solidFill>
+                  <a:srgbClr val="D00000"/>
+                </a:solidFill>
+                <a:latin typeface="Atkinson Hyperlegible" pitchFamily="2" charset="77"/>
+                <a:ea typeface="ＭＳ Ｐゴシック" panose="020B0600070205080204" pitchFamily="34" charset="-128"/>
+                <a:cs typeface="Times New Roman" panose="02020603050405020304" pitchFamily="18" charset="0"/>
+              </a:rPr>
+              <a:t>US Census Data: </a:t>
+            </a:r>
+            <a:r>
+              <a:rPr lang="en-US" altLang="en-US" sz="3200" dirty="0">
+                <a:latin typeface="Atkinson Hyperlegible" pitchFamily="2" charset="77"/>
+                <a:ea typeface="ＭＳ Ｐゴシック" panose="020B0600070205080204" pitchFamily="34" charset="-128"/>
+                <a:cs typeface="Times New Roman" panose="02020603050405020304" pitchFamily="18" charset="0"/>
+              </a:rPr>
+              <a:t>Obtained local demographics by city/town from US Census (2020)  &amp; American Community Survey (2021) data via the </a:t>
+            </a:r>
+            <a:r>
+              <a:rPr lang="en-US" altLang="en-US" sz="3200" dirty="0">
+                <a:latin typeface="Atkinson Hyperlegible" pitchFamily="2" charset="77"/>
+                <a:ea typeface="ＭＳ Ｐゴシック" panose="020B0600070205080204" pitchFamily="34" charset="-128"/>
+                <a:cs typeface="Times New Roman" panose="02020603050405020304" pitchFamily="18" charset="0"/>
+                <a:hlinkClick r:id="rId6"/>
+              </a:rPr>
+              <a:t>Census Bureau API </a:t>
+            </a:r>
+            <a:r>
+              <a:rPr lang="en-US" altLang="en-US" sz="3200" dirty="0">
+                <a:latin typeface="Atkinson Hyperlegible" pitchFamily="2" charset="77"/>
+                <a:ea typeface="ＭＳ Ｐゴシック" panose="020B0600070205080204" pitchFamily="34" charset="-128"/>
+                <a:cs typeface="Times New Roman" panose="02020603050405020304" pitchFamily="18" charset="0"/>
+              </a:rPr>
+              <a:t>&amp; </a:t>
+            </a:r>
+            <a:r>
+              <a:rPr lang="en-US" altLang="en-US" sz="3200" dirty="0">
+                <a:latin typeface="Atkinson Hyperlegible" pitchFamily="2" charset="77"/>
+                <a:ea typeface="ＭＳ Ｐゴシック" panose="020B0600070205080204" pitchFamily="34" charset="-128"/>
+                <a:cs typeface="Times New Roman" panose="02020603050405020304" pitchFamily="18" charset="0"/>
+                <a:hlinkClick r:id="rId7"/>
+              </a:rPr>
+              <a:t>tidycensus</a:t>
+            </a:r>
+            <a:r>
+              <a:rPr lang="en-US" altLang="en-US" sz="3200" dirty="0">
+                <a:latin typeface="Atkinson Hyperlegible" pitchFamily="2" charset="77"/>
+                <a:ea typeface="ＭＳ Ｐゴシック" panose="020B0600070205080204" pitchFamily="34" charset="-128"/>
+                <a:cs typeface="Times New Roman" panose="02020603050405020304" pitchFamily="18" charset="0"/>
+              </a:rPr>
+              <a:t> R packages (</a:t>
+            </a:r>
+            <a:r>
+              <a:rPr lang="en-US" altLang="en-US" sz="3200" dirty="0" err="1">
+                <a:latin typeface="Atkinson Hyperlegible" pitchFamily="2" charset="77"/>
+                <a:ea typeface="ＭＳ Ｐゴシック" panose="020B0600070205080204" pitchFamily="34" charset="-128"/>
+                <a:cs typeface="Times New Roman" panose="02020603050405020304" pitchFamily="18" charset="0"/>
+              </a:rPr>
+              <a:t>Recht</a:t>
+            </a:r>
+            <a:r>
+              <a:rPr lang="en-US" altLang="en-US" sz="3200" dirty="0">
+                <a:latin typeface="Atkinson Hyperlegible" pitchFamily="2" charset="77"/>
+                <a:ea typeface="ＭＳ Ｐゴシック" panose="020B0600070205080204" pitchFamily="34" charset="-128"/>
+                <a:cs typeface="Times New Roman" panose="02020603050405020304" pitchFamily="18" charset="0"/>
+              </a:rPr>
+              <a:t>, 2024; Walker &amp; Herman, 2024) </a:t>
+            </a:r>
+          </a:p>
+          <a:p>
+            <a:endParaRPr lang="en-US" sz="3200" dirty="0">
+              <a:latin typeface="Atkinson Hyperlegible" pitchFamily="2" charset="77"/>
+            </a:endParaRPr>
           </a:p>
         </p:txBody>
       </p:sp>
@@ -5104,10 +5335,10 @@
       </p:sp>
       <p:sp>
         <p:nvSpPr>
-          <p:cNvPr id="82" name="TextBox 81">
+          <p:cNvPr id="61" name="TextBox 60">
             <a:extLst>
               <a:ext uri="{FF2B5EF4-FFF2-40B4-BE49-F238E27FC236}">
-                <a16:creationId xmlns:a16="http://schemas.microsoft.com/office/drawing/2014/main" id="{531715C0-F76E-B6D9-6232-D7C83B44CD08}"/>
+                <a16:creationId xmlns:a16="http://schemas.microsoft.com/office/drawing/2014/main" id="{BFBC2080-1071-CF6E-796B-62AB4D4DB2FA}"/>
               </a:ext>
             </a:extLst>
           </p:cNvPr>
@@ -5116,8 +5347,8 @@
         </p:nvSpPr>
         <p:spPr>
           <a:xfrm>
-            <a:off x="129183" y="30429844"/>
-            <a:ext cx="11437151" cy="2554545"/>
+            <a:off x="38468956" y="5232820"/>
+            <a:ext cx="10808640" cy="1219501"/>
           </a:xfrm>
           <a:prstGeom prst="rect">
             <a:avLst/>
@@ -5130,6 +5361,15 @@
           </a:bodyPr>
           <a:lstStyle/>
           <a:p>
+            <a:pPr eaLnBrk="1" hangingPunct="1">
+              <a:lnSpc>
+                <a:spcPts val="4456"/>
+              </a:lnSpc>
+              <a:spcBef>
+                <a:spcPct val="20000"/>
+              </a:spcBef>
+              <a:defRPr/>
+            </a:pPr>
             <a:r>
               <a:rPr lang="en-US" altLang="en-US" sz="3200" dirty="0">
                 <a:solidFill>
@@ -5139,7 +5379,7 @@
                 <a:ea typeface="ＭＳ Ｐゴシック" panose="020B0600070205080204" pitchFamily="34" charset="-128"/>
                 <a:cs typeface="Times New Roman" panose="02020603050405020304" pitchFamily="18" charset="0"/>
               </a:rPr>
-              <a:t>US Census Data: </a:t>
+              <a:t>Waiver Preference in Policy: </a:t>
             </a:r>
             <a:r>
               <a:rPr lang="en-US" altLang="en-US" sz="3200" dirty="0">
@@ -5147,619 +5387,19 @@
                 <a:ea typeface="ＭＳ Ｐゴシック" panose="020B0600070205080204" pitchFamily="34" charset="-128"/>
                 <a:cs typeface="Times New Roman" panose="02020603050405020304" pitchFamily="18" charset="0"/>
               </a:rPr>
-              <a:t>Obtained local demographics by city/town from US Census (2020)  &amp; American Community Survey (2021) data via the </a:t>
-            </a:r>
-            <a:r>
-              <a:rPr lang="en-US" altLang="en-US" sz="3200" dirty="0">
-                <a:latin typeface="Atkinson Hyperlegible" pitchFamily="2" charset="77"/>
-                <a:ea typeface="ＭＳ Ｐゴシック" panose="020B0600070205080204" pitchFamily="34" charset="-128"/>
-                <a:cs typeface="Times New Roman" panose="02020603050405020304" pitchFamily="18" charset="0"/>
-                <a:hlinkClick r:id="rId6"/>
-              </a:rPr>
-              <a:t>Census Bureau API </a:t>
-            </a:r>
-            <a:r>
-              <a:rPr lang="en-US" altLang="en-US" sz="3200" dirty="0">
-                <a:latin typeface="Atkinson Hyperlegible" pitchFamily="2" charset="77"/>
-                <a:ea typeface="ＭＳ Ｐゴシック" panose="020B0600070205080204" pitchFamily="34" charset="-128"/>
-                <a:cs typeface="Times New Roman" panose="02020603050405020304" pitchFamily="18" charset="0"/>
-              </a:rPr>
-              <a:t>&amp; </a:t>
-            </a:r>
-            <a:r>
-              <a:rPr lang="en-US" altLang="en-US" sz="3200" dirty="0">
-                <a:latin typeface="Atkinson Hyperlegible" pitchFamily="2" charset="77"/>
-                <a:ea typeface="ＭＳ Ｐゴシック" panose="020B0600070205080204" pitchFamily="34" charset="-128"/>
-                <a:cs typeface="Times New Roman" panose="02020603050405020304" pitchFamily="18" charset="0"/>
-                <a:hlinkClick r:id="rId7"/>
-              </a:rPr>
-              <a:t>tidycensus</a:t>
-            </a:r>
-            <a:r>
-              <a:rPr lang="en-US" altLang="en-US" sz="3200" dirty="0">
-                <a:latin typeface="Atkinson Hyperlegible" pitchFamily="2" charset="77"/>
-                <a:ea typeface="ＭＳ Ｐゴシック" panose="020B0600070205080204" pitchFamily="34" charset="-128"/>
-                <a:cs typeface="Times New Roman" panose="02020603050405020304" pitchFamily="18" charset="0"/>
-              </a:rPr>
-              <a:t> R packages (</a:t>
-            </a:r>
-            <a:r>
-              <a:rPr lang="en-US" altLang="en-US" sz="3200" dirty="0" err="1">
-                <a:latin typeface="Atkinson Hyperlegible" pitchFamily="2" charset="77"/>
-                <a:ea typeface="ＭＳ Ｐゴシック" panose="020B0600070205080204" pitchFamily="34" charset="-128"/>
-                <a:cs typeface="Times New Roman" panose="02020603050405020304" pitchFamily="18" charset="0"/>
-              </a:rPr>
-              <a:t>Recht</a:t>
-            </a:r>
-            <a:r>
-              <a:rPr lang="en-US" altLang="en-US" sz="3200" dirty="0">
-                <a:latin typeface="Atkinson Hyperlegible" pitchFamily="2" charset="77"/>
-                <a:ea typeface="ＭＳ Ｐゴシック" panose="020B0600070205080204" pitchFamily="34" charset="-128"/>
-                <a:cs typeface="Times New Roman" panose="02020603050405020304" pitchFamily="18" charset="0"/>
-              </a:rPr>
-              <a:t>, 2024; Walker &amp; Herman, 2024) </a:t>
-            </a:r>
-          </a:p>
-          <a:p>
+              <a:t>Coded each departmental policy for inclusion of Written Consent Preference</a:t>
+            </a:r>
             <a:endParaRPr lang="en-US" sz="3200" dirty="0">
               <a:latin typeface="Atkinson Hyperlegible" pitchFamily="2" charset="77"/>
-            </a:endParaRPr>
-          </a:p>
-        </p:txBody>
-      </p:sp>
-      <p:sp>
-        <p:nvSpPr>
-          <p:cNvPr id="83" name="Text Box 34">
-            <a:extLst>
-              <a:ext uri="{FF2B5EF4-FFF2-40B4-BE49-F238E27FC236}">
-                <a16:creationId xmlns:a16="http://schemas.microsoft.com/office/drawing/2014/main" id="{5A798C10-EDDD-4636-4D67-3840C46FA6B6}"/>
-              </a:ext>
-            </a:extLst>
-          </p:cNvPr>
-          <p:cNvSpPr txBox="1"/>
-          <p:nvPr/>
-        </p:nvSpPr>
-        <p:spPr>
-          <a:xfrm>
-            <a:off x="37851499" y="21533236"/>
-            <a:ext cx="11593245" cy="850394"/>
-          </a:xfrm>
-          <a:prstGeom prst="rect">
-            <a:avLst/>
-          </a:prstGeom>
-          <a:solidFill>
-            <a:srgbClr val="D00000"/>
-          </a:solidFill>
-          <a:ln w="12700">
-            <a:miter lim="400000"/>
-          </a:ln>
-          <a:extLst>
-            <a:ext uri="{C572A759-6A51-4108-AA02-DFA0A04FC94B}">
-              <ma14:wrappingTextBoxFlag xmlns="" xmlns:m="http://schemas.openxmlformats.org/officeDocument/2006/math" xmlns:a14="http://schemas.microsoft.com/office/drawing/2010/main" xmlns:ma14="http://schemas.microsoft.com/office/mac/drawingml/2011/main" val="1"/>
-            </a:ext>
-          </a:extLst>
-        </p:spPr>
-        <p:txBody>
-          <a:bodyPr wrap="square" lIns="45710" tIns="45710" rIns="45710" bIns="45710">
-            <a:spAutoFit/>
-          </a:bodyPr>
-          <a:lstStyle>
-            <a:lvl1pPr algn="ctr">
-              <a:spcBef>
-                <a:spcPts val="2500"/>
-              </a:spcBef>
-              <a:defRPr sz="4800" b="1">
-                <a:solidFill>
-                  <a:srgbClr val="FFFFFF"/>
-                </a:solidFill>
-                <a:latin typeface="Arial"/>
-                <a:ea typeface="Arial"/>
-                <a:cs typeface="Arial"/>
-                <a:sym typeface="Arial"/>
-              </a:defRPr>
-            </a:lvl1pPr>
-          </a:lstStyle>
-          <a:p>
-            <a:r>
-              <a:rPr lang="en-US" dirty="0">
-                <a:latin typeface="Atkinson Hyperlegible" pitchFamily="2" charset="77"/>
-              </a:rPr>
-              <a:t>Discussion</a:t>
-            </a:r>
-            <a:endParaRPr dirty="0">
-              <a:latin typeface="Atkinson Hyperlegible" pitchFamily="2" charset="77"/>
-            </a:endParaRPr>
-          </a:p>
-        </p:txBody>
-      </p:sp>
-      <p:sp>
-        <p:nvSpPr>
-          <p:cNvPr id="85" name="TextBox 84">
-            <a:extLst>
-              <a:ext uri="{FF2B5EF4-FFF2-40B4-BE49-F238E27FC236}">
-                <a16:creationId xmlns:a16="http://schemas.microsoft.com/office/drawing/2014/main" id="{524300AD-0120-D4EC-14F9-34065D206394}"/>
-              </a:ext>
-            </a:extLst>
-          </p:cNvPr>
-          <p:cNvSpPr txBox="1"/>
-          <p:nvPr/>
-        </p:nvSpPr>
-        <p:spPr>
-          <a:xfrm>
-            <a:off x="38503997" y="13582323"/>
-            <a:ext cx="10400698" cy="2062103"/>
-          </a:xfrm>
-          <a:prstGeom prst="rect">
-            <a:avLst/>
-          </a:prstGeom>
-          <a:noFill/>
-        </p:spPr>
-        <p:txBody>
-          <a:bodyPr wrap="square">
-            <a:spAutoFit/>
-          </a:bodyPr>
-          <a:lstStyle/>
-          <a:p>
-            <a:r>
-              <a:rPr lang="en-US" altLang="en-US" sz="3200" dirty="0">
-                <a:solidFill>
-                  <a:srgbClr val="D00000"/>
-                </a:solidFill>
-                <a:latin typeface="Atkinson Hyperlegible" pitchFamily="2" charset="77"/>
-                <a:ea typeface="ＭＳ Ｐゴシック" panose="020B0600070205080204" pitchFamily="34" charset="-128"/>
-                <a:cs typeface="Times New Roman" panose="02020603050405020304" pitchFamily="18" charset="0"/>
-              </a:rPr>
-              <a:t>Binary Logistic Regression:</a:t>
-            </a:r>
-            <a:r>
-              <a:rPr lang="en-US" altLang="en-US" sz="3200" dirty="0">
-                <a:latin typeface="Atkinson Hyperlegible" pitchFamily="2" charset="77"/>
-                <a:ea typeface="ＭＳ Ｐゴシック" panose="020B0600070205080204" pitchFamily="34" charset="-128"/>
-                <a:cs typeface="Times New Roman" panose="02020603050405020304" pitchFamily="18" charset="0"/>
-              </a:rPr>
-              <a:t> Predicted inclusion of waiver preference (YES = 1; NO = 0) in policy based on median age, household income, &amp; the percentage of Black residents</a:t>
-            </a:r>
-            <a:endParaRPr lang="en-US" sz="3200" dirty="0">
-              <a:latin typeface="Atkinson Hyperlegible" pitchFamily="2" charset="77"/>
-            </a:endParaRPr>
-          </a:p>
-        </p:txBody>
-      </p:sp>
-      <p:sp>
-        <p:nvSpPr>
-          <p:cNvPr id="96" name="TextBox 95">
-            <a:extLst>
-              <a:ext uri="{FF2B5EF4-FFF2-40B4-BE49-F238E27FC236}">
-                <a16:creationId xmlns:a16="http://schemas.microsoft.com/office/drawing/2014/main" id="{7707E4A8-700A-6220-BB9D-A2E0268E1CB1}"/>
-              </a:ext>
-            </a:extLst>
-          </p:cNvPr>
-          <p:cNvSpPr txBox="1"/>
-          <p:nvPr/>
-        </p:nvSpPr>
-        <p:spPr>
-          <a:xfrm>
-            <a:off x="38312795" y="22705151"/>
-            <a:ext cx="10591900" cy="8435258"/>
-          </a:xfrm>
-          <a:prstGeom prst="rect">
-            <a:avLst/>
-          </a:prstGeom>
-          <a:noFill/>
-        </p:spPr>
-        <p:txBody>
-          <a:bodyPr wrap="square">
-            <a:spAutoFit/>
-          </a:bodyPr>
-          <a:lstStyle/>
-          <a:p>
-            <a:pPr marL="457200" indent="-457200">
-              <a:lnSpc>
-                <a:spcPct val="120000"/>
-              </a:lnSpc>
-              <a:buFont typeface="Arial" panose="020B0604020202020204" pitchFamily="34" charset="0"/>
-              <a:buChar char="•"/>
-            </a:pPr>
-            <a:r>
-              <a:rPr lang="en-US" altLang="en-US" sz="3200" dirty="0">
-                <a:latin typeface="Atkinson Hyperlegible" pitchFamily="2" charset="77"/>
-                <a:ea typeface="ＭＳ Ｐゴシック" panose="020B0600070205080204" pitchFamily="34" charset="-128"/>
-                <a:cs typeface="Times New Roman" panose="02020603050405020304" pitchFamily="18" charset="0"/>
-              </a:rPr>
-              <a:t>Towns younger residents prefer written consent to search waivers indication that there may be more political awareness around policing. </a:t>
-            </a:r>
-          </a:p>
-          <a:p>
-            <a:pPr marL="457200" indent="-457200">
-              <a:lnSpc>
-                <a:spcPct val="120000"/>
-              </a:lnSpc>
-              <a:buFont typeface="Arial" panose="020B0604020202020204" pitchFamily="34" charset="0"/>
-              <a:buChar char="•"/>
-            </a:pPr>
-            <a:r>
-              <a:rPr lang="en-US" altLang="en-US" sz="3200" dirty="0">
-                <a:latin typeface="Atkinson Hyperlegible" pitchFamily="2" charset="77"/>
-                <a:ea typeface="ＭＳ Ｐゴシック" panose="020B0600070205080204" pitchFamily="34" charset="-128"/>
-                <a:cs typeface="Times New Roman" panose="02020603050405020304" pitchFamily="18" charset="0"/>
-              </a:rPr>
-              <a:t>Looking at Cambridge, MA, a university town home to Harvard and MIT, may be more likely to adopt the written waiver policy as they may be more responsive to political needs of younger residents. </a:t>
-            </a:r>
-          </a:p>
-          <a:p>
-            <a:pPr marL="457200" indent="-457200">
-              <a:lnSpc>
-                <a:spcPct val="120000"/>
-              </a:lnSpc>
-              <a:buFont typeface="Arial" panose="020B0604020202020204" pitchFamily="34" charset="0"/>
-              <a:buChar char="•"/>
-            </a:pPr>
-            <a:r>
-              <a:rPr lang="en-US" altLang="en-US" sz="3200" dirty="0">
-                <a:latin typeface="Atkinson Hyperlegible" pitchFamily="2" charset="77"/>
-                <a:ea typeface="ＭＳ Ｐゴシック" panose="020B0600070205080204" pitchFamily="34" charset="-128"/>
-                <a:cs typeface="Times New Roman" panose="02020603050405020304" pitchFamily="18" charset="0"/>
-              </a:rPr>
-              <a:t>Increase of political and racial movements may allow for younger residents to be more aware of their rights. </a:t>
-            </a:r>
-          </a:p>
-          <a:p>
-            <a:pPr>
-              <a:lnSpc>
-                <a:spcPts val="4690"/>
-              </a:lnSpc>
-              <a:spcBef>
-                <a:spcPts val="135"/>
-              </a:spcBef>
-              <a:spcAft>
-                <a:spcPts val="135"/>
-              </a:spcAft>
-              <a:defRPr/>
-            </a:pPr>
-            <a:r>
-              <a:rPr lang="en-US" altLang="en-US" sz="3200" dirty="0">
-                <a:solidFill>
-                  <a:srgbClr val="D00000"/>
-                </a:solidFill>
-                <a:latin typeface="Atkinson Hyperlegible" pitchFamily="2" charset="77"/>
-                <a:cs typeface="Times New Roman" panose="02020603050405020304" pitchFamily="18" charset="0"/>
-              </a:rPr>
-              <a:t>Limitations: </a:t>
-            </a:r>
-            <a:r>
-              <a:rPr lang="en-US" altLang="en-US" sz="3200" dirty="0">
-                <a:latin typeface="Atkinson Hyperlegible" pitchFamily="2" charset="77"/>
-                <a:ea typeface="ＭＳ Ｐゴシック" panose="020B0600070205080204" pitchFamily="34" charset="-128"/>
-                <a:cs typeface="Times New Roman" panose="02020603050405020304" pitchFamily="18" charset="0"/>
-              </a:rPr>
-              <a:t>Did not locate policies from every municipal police department &amp; analyses limited to MA </a:t>
-            </a:r>
-            <a:endParaRPr lang="en-US" altLang="en-US" sz="3200" dirty="0">
-              <a:solidFill>
-                <a:srgbClr val="D00000"/>
-              </a:solidFill>
-              <a:latin typeface="Atkinson Hyperlegible" pitchFamily="2" charset="77"/>
+              <a:ea typeface="Georgia" panose="02040502050405020303" pitchFamily="18" charset="0"/>
               <a:cs typeface="Times New Roman" panose="02020603050405020304" pitchFamily="18" charset="0"/>
             </a:endParaRPr>
           </a:p>
-          <a:p>
-            <a:pPr>
-              <a:lnSpc>
-                <a:spcPts val="4690"/>
-              </a:lnSpc>
-              <a:spcBef>
-                <a:spcPts val="135"/>
-              </a:spcBef>
-              <a:spcAft>
-                <a:spcPts val="135"/>
-              </a:spcAft>
-              <a:defRPr/>
-            </a:pPr>
-            <a:r>
-              <a:rPr lang="en-US" altLang="en-US" sz="3200" dirty="0">
-                <a:solidFill>
-                  <a:srgbClr val="D00000"/>
-                </a:solidFill>
-                <a:latin typeface="Atkinson Hyperlegible" pitchFamily="2" charset="77"/>
-                <a:cs typeface="Times New Roman" panose="02020603050405020304" pitchFamily="18" charset="0"/>
-              </a:rPr>
-              <a:t>Future Directions: </a:t>
-            </a:r>
-            <a:r>
-              <a:rPr lang="en-US" sz="3200" dirty="0">
-                <a:latin typeface="Atkinson Hyperlegible" pitchFamily="2" charset="77"/>
-                <a:ea typeface="Georgia" panose="02040502050405020303" pitchFamily="18" charset="0"/>
-                <a:cs typeface="Times New Roman" panose="02020603050405020304" pitchFamily="18" charset="0"/>
-              </a:rPr>
-              <a:t>Examine the implications of adopting formal waiver procedures for both departments and individual consent search decisions</a:t>
-            </a:r>
-          </a:p>
-        </p:txBody>
-      </p:sp>
-      <p:sp>
-        <p:nvSpPr>
-          <p:cNvPr id="33" name="TextBox 32">
-            <a:extLst>
-              <a:ext uri="{FF2B5EF4-FFF2-40B4-BE49-F238E27FC236}">
-                <a16:creationId xmlns:a16="http://schemas.microsoft.com/office/drawing/2014/main" id="{CB85B75B-CB15-5E7F-4615-F72E78889FED}"/>
-              </a:ext>
-            </a:extLst>
-          </p:cNvPr>
-          <p:cNvSpPr txBox="1"/>
-          <p:nvPr/>
-        </p:nvSpPr>
-        <p:spPr>
-          <a:xfrm>
-            <a:off x="13987076" y="23451556"/>
-            <a:ext cx="21471185" cy="3416320"/>
-          </a:xfrm>
-          <a:prstGeom prst="rect">
-            <a:avLst/>
-          </a:prstGeom>
-          <a:noFill/>
-        </p:spPr>
-        <p:txBody>
-          <a:bodyPr wrap="square" rtlCol="0">
-            <a:spAutoFit/>
-          </a:bodyPr>
-          <a:lstStyle/>
-          <a:p>
-            <a:r>
-              <a:rPr lang="en-US" sz="7200" b="1" dirty="0">
-                <a:latin typeface="Atkinson Hyperlegible" pitchFamily="2" charset="77"/>
-                <a:cs typeface="Times New Roman" panose="02020603050405020304" pitchFamily="18" charset="0"/>
-              </a:rPr>
-              <a:t>Police Departments serving </a:t>
-            </a:r>
-            <a:r>
-              <a:rPr lang="en-US" sz="7200" b="1" dirty="0">
-                <a:solidFill>
-                  <a:srgbClr val="D00000"/>
-                </a:solidFill>
-                <a:latin typeface="Atkinson Hyperlegible" pitchFamily="2" charset="77"/>
-                <a:cs typeface="Times New Roman" panose="02020603050405020304" pitchFamily="18" charset="0"/>
-              </a:rPr>
-              <a:t>younger populations </a:t>
-            </a:r>
-            <a:r>
-              <a:rPr lang="en-US" sz="7200" b="1" dirty="0">
-                <a:latin typeface="Atkinson Hyperlegible" pitchFamily="2" charset="77"/>
-                <a:cs typeface="Times New Roman" panose="02020603050405020304" pitchFamily="18" charset="0"/>
-              </a:rPr>
-              <a:t>may respond differently	to calls for consent search reforms…</a:t>
-            </a:r>
-            <a:endParaRPr lang="en-US" sz="7200" b="1" dirty="0">
-              <a:solidFill>
-                <a:schemeClr val="tx1">
-                  <a:lumMod val="65000"/>
-                  <a:lumOff val="35000"/>
-                </a:schemeClr>
-              </a:solidFill>
-              <a:latin typeface="Atkinson Hyperlegible" pitchFamily="2" charset="77"/>
-              <a:cs typeface="Times New Roman" panose="02020603050405020304" pitchFamily="18" charset="0"/>
-            </a:endParaRPr>
-          </a:p>
         </p:txBody>
       </p:sp>
       <p:pic>
         <p:nvPicPr>
-          <p:cNvPr id="35" name="Picture 34" descr="A map of massachusetts with red squares&#10;&#10;Description automatically generated">
-            <a:extLst>
-              <a:ext uri="{FF2B5EF4-FFF2-40B4-BE49-F238E27FC236}">
-                <a16:creationId xmlns:a16="http://schemas.microsoft.com/office/drawing/2014/main" id="{7A33CF85-812E-DDEB-6B43-7250AB6ED28A}"/>
-              </a:ext>
-            </a:extLst>
-          </p:cNvPr>
-          <p:cNvPicPr>
-            <a:picLocks noChangeAspect="1"/>
-          </p:cNvPicPr>
-          <p:nvPr/>
-        </p:nvPicPr>
-        <p:blipFill>
-          <a:blip r:embed="rId8">
-            <a:extLst>
-              <a:ext uri="{28A0092B-C50C-407E-A947-70E740481C1C}">
-                <a14:useLocalDpi xmlns:a14="http://schemas.microsoft.com/office/drawing/2010/main" val="0"/>
-              </a:ext>
-            </a:extLst>
-          </a:blip>
-          <a:stretch>
-            <a:fillRect/>
-          </a:stretch>
-        </p:blipFill>
-        <p:spPr>
-          <a:xfrm>
-            <a:off x="12220276" y="27419590"/>
-            <a:ext cx="8164615" cy="5013084"/>
-          </a:xfrm>
-          <a:prstGeom prst="rect">
-            <a:avLst/>
-          </a:prstGeom>
-        </p:spPr>
-      </p:pic>
-      <p:pic>
-        <p:nvPicPr>
-          <p:cNvPr id="38" name="Picture 37" descr="A map of massachusetts and massachusetts state&#10;&#10;Description automatically generated">
-            <a:extLst>
-              <a:ext uri="{FF2B5EF4-FFF2-40B4-BE49-F238E27FC236}">
-                <a16:creationId xmlns:a16="http://schemas.microsoft.com/office/drawing/2014/main" id="{0A9B6E0D-443F-3E3E-50FA-B6DD74DF4B04}"/>
-              </a:ext>
-            </a:extLst>
-          </p:cNvPr>
-          <p:cNvPicPr>
-            <a:picLocks noChangeAspect="1"/>
-          </p:cNvPicPr>
-          <p:nvPr/>
-        </p:nvPicPr>
-        <p:blipFill>
-          <a:blip r:embed="rId9">
-            <a:extLst>
-              <a:ext uri="{28A0092B-C50C-407E-A947-70E740481C1C}">
-                <a14:useLocalDpi xmlns:a14="http://schemas.microsoft.com/office/drawing/2010/main" val="0"/>
-              </a:ext>
-            </a:extLst>
-          </a:blip>
-          <a:stretch>
-            <a:fillRect/>
-          </a:stretch>
-        </p:blipFill>
-        <p:spPr>
-          <a:xfrm>
-            <a:off x="19997157" y="26797417"/>
-            <a:ext cx="9451025" cy="5802943"/>
-          </a:xfrm>
-          <a:prstGeom prst="rect">
-            <a:avLst/>
-          </a:prstGeom>
-        </p:spPr>
-      </p:pic>
-      <p:pic>
-        <p:nvPicPr>
-          <p:cNvPr id="39" name="Picture 38" descr="A map of the state of massachusetts&#10;&#10;Description automatically generated">
-            <a:extLst>
-              <a:ext uri="{FF2B5EF4-FFF2-40B4-BE49-F238E27FC236}">
-                <a16:creationId xmlns:a16="http://schemas.microsoft.com/office/drawing/2014/main" id="{7CA407B0-1E2E-D461-74F5-75D722253A16}"/>
-              </a:ext>
-            </a:extLst>
-          </p:cNvPr>
-          <p:cNvPicPr>
-            <a:picLocks noChangeAspect="1"/>
-          </p:cNvPicPr>
-          <p:nvPr/>
-        </p:nvPicPr>
-        <p:blipFill>
-          <a:blip r:embed="rId10">
-            <a:extLst>
-              <a:ext uri="{28A0092B-C50C-407E-A947-70E740481C1C}">
-                <a14:useLocalDpi xmlns:a14="http://schemas.microsoft.com/office/drawing/2010/main" val="0"/>
-              </a:ext>
-            </a:extLst>
-          </a:blip>
-          <a:stretch>
-            <a:fillRect/>
-          </a:stretch>
-        </p:blipFill>
-        <p:spPr>
-          <a:xfrm>
-            <a:off x="28399547" y="27407069"/>
-            <a:ext cx="8753870" cy="5374888"/>
-          </a:xfrm>
-          <a:prstGeom prst="rect">
-            <a:avLst/>
-          </a:prstGeom>
-        </p:spPr>
-      </p:pic>
-      <p:pic>
-        <p:nvPicPr>
-          <p:cNvPr id="41" name="Picture 40" descr="A graph with a red line&#10;&#10;Description automatically generated">
-            <a:extLst>
-              <a:ext uri="{FF2B5EF4-FFF2-40B4-BE49-F238E27FC236}">
-                <a16:creationId xmlns:a16="http://schemas.microsoft.com/office/drawing/2014/main" id="{0B5F64C5-8312-638D-3C26-DD89FC00309A}"/>
-              </a:ext>
-            </a:extLst>
-          </p:cNvPr>
-          <p:cNvPicPr>
-            <a:picLocks noChangeAspect="1"/>
-          </p:cNvPicPr>
-          <p:nvPr/>
-        </p:nvPicPr>
-        <p:blipFill>
-          <a:blip r:embed="rId11">
-            <a:extLst>
-              <a:ext uri="{28A0092B-C50C-407E-A947-70E740481C1C}">
-                <a14:useLocalDpi xmlns:a14="http://schemas.microsoft.com/office/drawing/2010/main" val="0"/>
-              </a:ext>
-            </a:extLst>
-          </a:blip>
-          <a:stretch>
-            <a:fillRect/>
-          </a:stretch>
-        </p:blipFill>
-        <p:spPr>
-          <a:xfrm>
-            <a:off x="38691818" y="16648860"/>
-            <a:ext cx="3168173" cy="3149077"/>
-          </a:xfrm>
-          <a:prstGeom prst="rect">
-            <a:avLst/>
-          </a:prstGeom>
-        </p:spPr>
-      </p:pic>
-      <p:pic>
-        <p:nvPicPr>
-          <p:cNvPr id="42" name="Picture 41" descr="A graph with a red line&#10;&#10;Description automatically generated">
-            <a:extLst>
-              <a:ext uri="{FF2B5EF4-FFF2-40B4-BE49-F238E27FC236}">
-                <a16:creationId xmlns:a16="http://schemas.microsoft.com/office/drawing/2014/main" id="{DF54D50F-E946-257F-E75B-FC639882A7C9}"/>
-              </a:ext>
-            </a:extLst>
-          </p:cNvPr>
-          <p:cNvPicPr>
-            <a:picLocks noChangeAspect="1"/>
-          </p:cNvPicPr>
-          <p:nvPr/>
-        </p:nvPicPr>
-        <p:blipFill>
-          <a:blip r:embed="rId12">
-            <a:extLst>
-              <a:ext uri="{28A0092B-C50C-407E-A947-70E740481C1C}">
-                <a14:useLocalDpi xmlns:a14="http://schemas.microsoft.com/office/drawing/2010/main" val="0"/>
-              </a:ext>
-            </a:extLst>
-          </a:blip>
-          <a:stretch>
-            <a:fillRect/>
-          </a:stretch>
-        </p:blipFill>
-        <p:spPr>
-          <a:xfrm>
-            <a:off x="45559282" y="16648860"/>
-            <a:ext cx="3168173" cy="3149077"/>
-          </a:xfrm>
-          <a:prstGeom prst="rect">
-            <a:avLst/>
-          </a:prstGeom>
-        </p:spPr>
-      </p:pic>
-      <p:pic>
-        <p:nvPicPr>
-          <p:cNvPr id="43" name="Picture 42" descr="A graph with a red line&#10;&#10;Description automatically generated">
-            <a:extLst>
-              <a:ext uri="{FF2B5EF4-FFF2-40B4-BE49-F238E27FC236}">
-                <a16:creationId xmlns:a16="http://schemas.microsoft.com/office/drawing/2014/main" id="{944FCB29-67B0-DBD5-6006-55E491D1C1EF}"/>
-              </a:ext>
-            </a:extLst>
-          </p:cNvPr>
-          <p:cNvPicPr>
-            <a:picLocks noChangeAspect="1"/>
-          </p:cNvPicPr>
-          <p:nvPr/>
-        </p:nvPicPr>
-        <p:blipFill>
-          <a:blip r:embed="rId13">
-            <a:extLst>
-              <a:ext uri="{28A0092B-C50C-407E-A947-70E740481C1C}">
-                <a14:useLocalDpi xmlns:a14="http://schemas.microsoft.com/office/drawing/2010/main" val="0"/>
-              </a:ext>
-            </a:extLst>
-          </a:blip>
-          <a:stretch>
-            <a:fillRect/>
-          </a:stretch>
-        </p:blipFill>
-        <p:spPr>
-          <a:xfrm>
-            <a:off x="42079037" y="16648860"/>
-            <a:ext cx="3168173" cy="3149077"/>
-          </a:xfrm>
-          <a:prstGeom prst="rect">
-            <a:avLst/>
-          </a:prstGeom>
-        </p:spPr>
-      </p:pic>
-      <p:pic>
-        <p:nvPicPr>
-          <p:cNvPr id="5" name="Picture 4" descr="A screenshot of a computer screen&#10;&#10;Description automatically generated">
+          <p:cNvPr id="5" name="Picture 4" descr="Written-consent preference pictogram. The poster reports that 107 of the 134 located departmental policies (79.8%) preferred written consent waivers; 27 did not include that preference.">
             <a:extLst>
               <a:ext uri="{FF2B5EF4-FFF2-40B4-BE49-F238E27FC236}">
                 <a16:creationId xmlns:a16="http://schemas.microsoft.com/office/drawing/2014/main" id="{13EF4D8B-BFB8-EADE-FA1D-29A56ABC2884}"/>
@@ -5795,234 +5435,102 @@
       </p:pic>
       <p:sp>
         <p:nvSpPr>
-          <p:cNvPr id="4" name="Rectangle 3">
+          <p:cNvPr id="37" name="TextBox 36">
             <a:extLst>
               <a:ext uri="{FF2B5EF4-FFF2-40B4-BE49-F238E27FC236}">
-                <a16:creationId xmlns:a16="http://schemas.microsoft.com/office/drawing/2014/main" id="{F56A2F1C-4B3F-13EF-8971-EB6C48FB90C5}"/>
+                <a16:creationId xmlns:a16="http://schemas.microsoft.com/office/drawing/2014/main" id="{357C64D1-B11B-ED8F-6123-A05AE3728A6D}"/>
               </a:ext>
             </a:extLst>
           </p:cNvPr>
-          <p:cNvSpPr/>
+          <p:cNvSpPr txBox="1"/>
           <p:nvPr/>
         </p:nvSpPr>
         <p:spPr>
           <a:xfrm>
-            <a:off x="-63299" y="3636815"/>
-            <a:ext cx="11593246" cy="29347573"/>
+            <a:off x="25936547" y="4339856"/>
+            <a:ext cx="11593246" cy="5940088"/>
           </a:xfrm>
           <a:prstGeom prst="rect">
             <a:avLst/>
           </a:prstGeom>
           <a:noFill/>
-          <a:ln w="193675">
-            <a:solidFill>
-              <a:srgbClr val="D00000"/>
-            </a:solidFill>
-          </a:ln>
         </p:spPr>
-        <p:style>
-          <a:lnRef idx="2">
-            <a:schemeClr val="accent1">
-              <a:shade val="15000"/>
-            </a:schemeClr>
-          </a:lnRef>
-          <a:fillRef idx="1">
-            <a:schemeClr val="accent1"/>
-          </a:fillRef>
-          <a:effectRef idx="0">
-            <a:schemeClr val="accent1"/>
-          </a:effectRef>
-          <a:fontRef idx="minor">
-            <a:schemeClr val="lt1"/>
-          </a:fontRef>
-        </p:style>
-        <p:txBody>
-          <a:bodyPr rtlCol="0" anchor="ctr"/>
-          <a:lstStyle/>
-          <a:p>
-            <a:pPr algn="ctr"/>
-            <a:endParaRPr lang="en-US" dirty="0">
-              <a:solidFill>
-                <a:srgbClr val="D00000"/>
-              </a:solidFill>
-            </a:endParaRPr>
-          </a:p>
-        </p:txBody>
-      </p:sp>
-      <p:sp>
-        <p:nvSpPr>
-          <p:cNvPr id="6" name="Rectangle 5">
-            <a:extLst>
-              <a:ext uri="{FF2B5EF4-FFF2-40B4-BE49-F238E27FC236}">
-                <a16:creationId xmlns:a16="http://schemas.microsoft.com/office/drawing/2014/main" id="{4A500CDA-6872-8B86-B4A8-ACAE338307F8}"/>
-              </a:ext>
-            </a:extLst>
-          </p:cNvPr>
-          <p:cNvSpPr/>
-          <p:nvPr/>
-        </p:nvSpPr>
-        <p:spPr>
-          <a:xfrm>
-            <a:off x="38035326" y="3636815"/>
-            <a:ext cx="11593246" cy="29347573"/>
-          </a:xfrm>
-          <a:prstGeom prst="rect">
-            <a:avLst/>
-          </a:prstGeom>
-          <a:noFill/>
-          <a:ln w="193675">
-            <a:noFill/>
-          </a:ln>
-        </p:spPr>
-        <p:style>
-          <a:lnRef idx="2">
-            <a:schemeClr val="accent1">
-              <a:shade val="15000"/>
-            </a:schemeClr>
-          </a:lnRef>
-          <a:fillRef idx="1">
-            <a:schemeClr val="accent1"/>
-          </a:fillRef>
-          <a:effectRef idx="0">
-            <a:schemeClr val="accent1"/>
-          </a:effectRef>
-          <a:fontRef idx="minor">
-            <a:schemeClr val="lt1"/>
-          </a:fontRef>
-        </p:style>
-        <p:txBody>
-          <a:bodyPr rtlCol="0" anchor="ctr"/>
-          <a:lstStyle/>
-          <a:p>
-            <a:pPr algn="ctr"/>
-            <a:endParaRPr lang="en-US" dirty="0">
-              <a:solidFill>
-                <a:srgbClr val="D00000"/>
-              </a:solidFill>
-            </a:endParaRPr>
+        <p:txBody>
+          <a:bodyPr wrap="square" rtlCol="0">
+            <a:spAutoFit/>
+          </a:bodyPr>
+          <a:lstStyle/>
+          <a:p>
+            <a:pPr algn="r"/>
+            <a:r>
+              <a:rPr lang="en-US" sz="9200" b="1" dirty="0">
+                <a:solidFill>
+                  <a:schemeClr val="accent4"/>
+                </a:solidFill>
+                <a:latin typeface="Atkinson Hyperlegible" pitchFamily="2" charset="77"/>
+                <a:cs typeface="Times New Roman" panose="02020603050405020304" pitchFamily="18" charset="0"/>
+              </a:rPr>
+              <a:t>79.8% </a:t>
+            </a:r>
+            <a:r>
+              <a:rPr lang="en-US" sz="7200" b="1" dirty="0">
+                <a:solidFill>
+                  <a:schemeClr val="bg2"/>
+                </a:solidFill>
+                <a:latin typeface="Atkinson Hyperlegible" pitchFamily="2" charset="77"/>
+                <a:cs typeface="Times New Roman" panose="02020603050405020304" pitchFamily="18" charset="0"/>
+              </a:rPr>
+              <a:t>of department 	policies (107 out of 134) 	included a </a:t>
+            </a:r>
+            <a:r>
+              <a:rPr lang="en-US" sz="7200" b="1" dirty="0">
+                <a:solidFill>
+                  <a:schemeClr val="accent4">
+                    <a:lumMod val="20000"/>
+                    <a:lumOff val="80000"/>
+                  </a:schemeClr>
+                </a:solidFill>
+                <a:latin typeface="Atkinson Hyperlegible" pitchFamily="2" charset="77"/>
+                <a:cs typeface="Times New Roman" panose="02020603050405020304" pitchFamily="18" charset="0"/>
+              </a:rPr>
+              <a:t>preference</a:t>
+            </a:r>
+            <a:r>
+              <a:rPr lang="en-US" sz="7200" b="1" dirty="0">
+                <a:solidFill>
+                  <a:schemeClr val="bg2"/>
+                </a:solidFill>
+                <a:latin typeface="Atkinson Hyperlegible" pitchFamily="2" charset="77"/>
+                <a:cs typeface="Times New Roman" panose="02020603050405020304" pitchFamily="18" charset="0"/>
+              </a:rPr>
+              <a:t> 	for </a:t>
+            </a:r>
+            <a:r>
+              <a:rPr lang="en-US" sz="7200" b="1" dirty="0">
+                <a:solidFill>
+                  <a:schemeClr val="accent4"/>
+                </a:solidFill>
+                <a:latin typeface="Atkinson Hyperlegible" pitchFamily="2" charset="77"/>
+                <a:cs typeface="Times New Roman" panose="02020603050405020304" pitchFamily="18" charset="0"/>
+              </a:rPr>
+              <a:t>written </a:t>
+            </a:r>
+            <a:r>
+              <a:rPr lang="en-US" sz="7200" b="1" dirty="0">
+                <a:solidFill>
+                  <a:schemeClr val="bg2"/>
+                </a:solidFill>
+                <a:latin typeface="Atkinson Hyperlegible" pitchFamily="2" charset="77"/>
+                <a:cs typeface="Times New Roman" panose="02020603050405020304" pitchFamily="18" charset="0"/>
+              </a:rPr>
+              <a:t>consent 	waivers…</a:t>
+            </a:r>
           </a:p>
         </p:txBody>
       </p:sp>
       <p:grpSp>
         <p:nvGrpSpPr>
-          <p:cNvPr id="16" name="Group 15">
-            <a:extLst>
-              <a:ext uri="{FF2B5EF4-FFF2-40B4-BE49-F238E27FC236}">
-                <a16:creationId xmlns:a16="http://schemas.microsoft.com/office/drawing/2014/main" id="{7F106CD3-D11C-59FA-A3F2-465D604DDFDE}"/>
-              </a:ext>
-            </a:extLst>
-          </p:cNvPr>
-          <p:cNvGrpSpPr/>
-          <p:nvPr/>
-        </p:nvGrpSpPr>
-        <p:grpSpPr>
-          <a:xfrm>
-            <a:off x="27755494" y="11318757"/>
-            <a:ext cx="9439785" cy="9465039"/>
-            <a:chOff x="27703482" y="10942167"/>
-            <a:chExt cx="9439785" cy="9465039"/>
-          </a:xfrm>
-        </p:grpSpPr>
-        <p:sp>
-          <p:nvSpPr>
-            <p:cNvPr id="13" name="Oval 12">
-              <a:extLst>
-                <a:ext uri="{FF2B5EF4-FFF2-40B4-BE49-F238E27FC236}">
-                  <a16:creationId xmlns:a16="http://schemas.microsoft.com/office/drawing/2014/main" id="{13BB6B60-61E8-D4F7-882E-1134615628B3}"/>
-                </a:ext>
-              </a:extLst>
-            </p:cNvPr>
-            <p:cNvSpPr/>
-            <p:nvPr/>
-          </p:nvSpPr>
-          <p:spPr>
-            <a:xfrm>
-              <a:off x="27703482" y="10942167"/>
-              <a:ext cx="9439785" cy="9465039"/>
-            </a:xfrm>
-            <a:prstGeom prst="ellipse">
-              <a:avLst/>
-            </a:prstGeom>
-            <a:solidFill>
-              <a:schemeClr val="accent4"/>
-            </a:solidFill>
-            <a:ln w="127000">
-              <a:solidFill>
-                <a:schemeClr val="accent1">
-                  <a:shade val="15000"/>
-                </a:schemeClr>
-              </a:solidFill>
-            </a:ln>
-          </p:spPr>
-          <p:style>
-            <a:lnRef idx="2">
-              <a:schemeClr val="accent4"/>
-            </a:lnRef>
-            <a:fillRef idx="1">
-              <a:schemeClr val="lt1"/>
-            </a:fillRef>
-            <a:effectRef idx="0">
-              <a:schemeClr val="accent4"/>
-            </a:effectRef>
-            <a:fontRef idx="minor">
-              <a:schemeClr val="dk1"/>
-            </a:fontRef>
-          </p:style>
-          <p:txBody>
-            <a:bodyPr rtlCol="0" anchor="ctr"/>
-            <a:lstStyle/>
-            <a:p>
-              <a:pPr algn="ctr"/>
-              <a:endParaRPr lang="en-US" dirty="0"/>
-            </a:p>
-          </p:txBody>
-        </p:sp>
-        <p:pic>
-          <p:nvPicPr>
-            <p:cNvPr id="20" name="Picture 19" descr="A graph of numbers and a number of black and white squares&#10;&#10;Description automatically generated with medium confidence">
-              <a:extLst>
-                <a:ext uri="{FF2B5EF4-FFF2-40B4-BE49-F238E27FC236}">
-                  <a16:creationId xmlns:a16="http://schemas.microsoft.com/office/drawing/2014/main" id="{4C0DC5EB-A727-DEFF-E9F6-3D0ED2D8DF8E}"/>
-                </a:ext>
-              </a:extLst>
-            </p:cNvPr>
-            <p:cNvPicPr>
-              <a:picLocks noChangeAspect="1"/>
-            </p:cNvPicPr>
-            <p:nvPr/>
-          </p:nvPicPr>
-          <p:blipFill>
-            <a:blip r:embed="rId15">
-              <a:extLst>
-                <a:ext uri="{28A0092B-C50C-407E-A947-70E740481C1C}">
-                  <a14:useLocalDpi xmlns:a14="http://schemas.microsoft.com/office/drawing/2010/main" val="0"/>
-                </a:ext>
-              </a:extLst>
-            </a:blip>
-            <a:stretch>
-              <a:fillRect/>
-            </a:stretch>
-          </p:blipFill>
-          <p:spPr>
-            <a:xfrm>
-              <a:off x="29229263" y="12577889"/>
-              <a:ext cx="6586415" cy="6385750"/>
-            </a:xfrm>
-            <a:prstGeom prst="rect">
-              <a:avLst/>
-            </a:prstGeom>
-            <a:solidFill>
-              <a:schemeClr val="accent4"/>
-            </a:solidFill>
-            <a:ln w="127000">
-              <a:noFill/>
-            </a:ln>
-          </p:spPr>
-        </p:pic>
-      </p:grpSp>
-      <p:grpSp>
-        <p:nvGrpSpPr>
-          <p:cNvPr id="24" name="Group 23">
+          <p:cNvPr id="24" name="Group 23" descr="Map of Massachusetts municipal written-consent policies. Blue indicates a written-consent preference; red indicates no such preference in a located policy; gray indicates a policy was not found. Blue and red municipalities are dispersed across the state; many municipalities are gray. Overall, 107 of 134 located policies preferred written consent.">
             <a:extLst>
               <a:ext uri="{FF2B5EF4-FFF2-40B4-BE49-F238E27FC236}">
                 <a16:creationId xmlns:a16="http://schemas.microsoft.com/office/drawing/2014/main" id="{47AF5BAE-BE73-2D2A-C0A5-5BEFF1FE4407}"/>
@@ -6447,7 +5955,7 @@
         </p:grpSp>
         <p:pic>
           <p:nvPicPr>
-            <p:cNvPr id="21" name="Picture 20" descr="A map of the state of massachusetts&#10;&#10;Description automatically generated">
+            <p:cNvPr id="21" name="Picture 20" descr="Map of Massachusetts municipal written-consent policies. Blue indicates a written-consent preference; red indicates no such preference in a located policy; gray indicates a policy was not found. Blue and red municipalities are dispersed across the state; many municipalities are gray. Overall, 107 of 134 located policies preferred written consent.">
               <a:extLst>
                 <a:ext uri="{FF2B5EF4-FFF2-40B4-BE49-F238E27FC236}">
                   <a16:creationId xmlns:a16="http://schemas.microsoft.com/office/drawing/2014/main" id="{D1B6C99B-D88C-81D2-B1BA-48F82D9655FF}"/>
@@ -6484,316 +5992,63 @@
       </p:grpSp>
       <p:sp>
         <p:nvSpPr>
-          <p:cNvPr id="17" name="Rectangle 16">
+          <p:cNvPr id="85" name="TextBox 84">
             <a:extLst>
               <a:ext uri="{FF2B5EF4-FFF2-40B4-BE49-F238E27FC236}">
-                <a16:creationId xmlns:a16="http://schemas.microsoft.com/office/drawing/2014/main" id="{4476F015-B7BA-317E-4148-3ABCC3DAA377}"/>
+                <a16:creationId xmlns:a16="http://schemas.microsoft.com/office/drawing/2014/main" id="{524300AD-0120-D4EC-14F9-34065D206394}"/>
               </a:ext>
             </a:extLst>
           </p:cNvPr>
-          <p:cNvSpPr/>
+          <p:cNvSpPr txBox="1"/>
           <p:nvPr/>
         </p:nvSpPr>
         <p:spPr>
           <a:xfrm>
-            <a:off x="-63300" y="0"/>
-            <a:ext cx="49440899" cy="33136789"/>
+            <a:off x="38503997" y="13582323"/>
+            <a:ext cx="10400698" cy="2062103"/>
           </a:xfrm>
           <a:prstGeom prst="rect">
             <a:avLst/>
           </a:prstGeom>
           <a:noFill/>
-          <a:ln w="193675">
-            <a:solidFill>
-              <a:srgbClr val="D00000"/>
-            </a:solidFill>
-          </a:ln>
         </p:spPr>
-        <p:style>
-          <a:lnRef idx="2">
-            <a:schemeClr val="accent1">
-              <a:shade val="15000"/>
-            </a:schemeClr>
-          </a:lnRef>
-          <a:fillRef idx="1">
-            <a:schemeClr val="accent1"/>
-          </a:fillRef>
-          <a:effectRef idx="0">
-            <a:schemeClr val="accent1"/>
-          </a:effectRef>
-          <a:fontRef idx="minor">
-            <a:schemeClr val="lt1"/>
-          </a:fontRef>
-        </p:style>
-        <p:txBody>
-          <a:bodyPr rtlCol="0" anchor="ctr"/>
-          <a:lstStyle/>
-          <a:p>
-            <a:pPr algn="ctr"/>
-            <a:endParaRPr lang="en-US" dirty="0">
-              <a:solidFill>
-                <a:srgbClr val="D00000"/>
-              </a:solidFill>
+        <p:txBody>
+          <a:bodyPr wrap="square">
+            <a:spAutoFit/>
+          </a:bodyPr>
+          <a:lstStyle/>
+          <a:p>
+            <a:r>
+              <a:rPr lang="en-US" altLang="en-US" sz="3200" dirty="0">
+                <a:solidFill>
+                  <a:srgbClr val="D00000"/>
+                </a:solidFill>
+                <a:latin typeface="Atkinson Hyperlegible" pitchFamily="2" charset="77"/>
+                <a:ea typeface="ＭＳ Ｐゴシック" panose="020B0600070205080204" pitchFamily="34" charset="-128"/>
+                <a:cs typeface="Times New Roman" panose="02020603050405020304" pitchFamily="18" charset="0"/>
+              </a:rPr>
+              <a:t>Binary Logistic Regression:</a:t>
+            </a:r>
+            <a:r>
+              <a:rPr lang="en-US" altLang="en-US" sz="3200" dirty="0">
+                <a:latin typeface="Atkinson Hyperlegible" pitchFamily="2" charset="77"/>
+                <a:ea typeface="ＭＳ Ｐゴシック" panose="020B0600070205080204" pitchFamily="34" charset="-128"/>
+                <a:cs typeface="Times New Roman" panose="02020603050405020304" pitchFamily="18" charset="0"/>
+              </a:rPr>
+              <a:t> Predicted inclusion of waiver preference (YES = 1; NO = 0) in policy based on median age, household income, &amp; the percentage of Black residents</a:t>
+            </a:r>
+            <a:endParaRPr lang="en-US" sz="3200" dirty="0">
+              <a:latin typeface="Atkinson Hyperlegible" pitchFamily="2" charset="77"/>
             </a:endParaRPr>
           </a:p>
         </p:txBody>
       </p:sp>
-      <p:sp>
-        <p:nvSpPr>
-          <p:cNvPr id="25" name="Rectangle 24">
+      <p:pic>
+        <p:nvPicPr>
+          <p:cNvPr id="41" name="Picture 40" descr="Logistic-regression plot of predicted written-consent preference against median household income. The fitted line rises from roughly 75% at $40,000 to around 90% at $220,000, but the uncertainty band is wide. The poster reports no reliable association with income.">
             <a:extLst>
               <a:ext uri="{FF2B5EF4-FFF2-40B4-BE49-F238E27FC236}">
-                <a16:creationId xmlns:a16="http://schemas.microsoft.com/office/drawing/2014/main" id="{EB7303A5-1D83-7E7F-D5F2-FB10B418201D}"/>
-              </a:ext>
-            </a:extLst>
-          </p:cNvPr>
-          <p:cNvSpPr/>
-          <p:nvPr/>
-        </p:nvSpPr>
-        <p:spPr>
-          <a:xfrm>
-            <a:off x="99172" y="4509751"/>
-            <a:ext cx="11290619" cy="10623237"/>
-          </a:xfrm>
-          <a:prstGeom prst="rect">
-            <a:avLst/>
-          </a:prstGeom>
-          <a:noFill/>
-          <a:ln w="127000">
-            <a:solidFill>
-              <a:schemeClr val="tx1"/>
-            </a:solidFill>
-          </a:ln>
-        </p:spPr>
-        <p:style>
-          <a:lnRef idx="2">
-            <a:schemeClr val="accent1"/>
-          </a:lnRef>
-          <a:fillRef idx="1">
-            <a:schemeClr val="lt1"/>
-          </a:fillRef>
-          <a:effectRef idx="0">
-            <a:schemeClr val="accent1"/>
-          </a:effectRef>
-          <a:fontRef idx="minor">
-            <a:schemeClr val="dk1"/>
-          </a:fontRef>
-        </p:style>
-        <p:txBody>
-          <a:bodyPr rtlCol="0" anchor="ctr"/>
-          <a:lstStyle/>
-          <a:p>
-            <a:pPr algn="ctr"/>
-            <a:endParaRPr lang="en-US"/>
-          </a:p>
-        </p:txBody>
-      </p:sp>
-      <p:sp>
-        <p:nvSpPr>
-          <p:cNvPr id="27" name="Rectangle 26">
-            <a:extLst>
-              <a:ext uri="{FF2B5EF4-FFF2-40B4-BE49-F238E27FC236}">
-                <a16:creationId xmlns:a16="http://schemas.microsoft.com/office/drawing/2014/main" id="{DAD5089B-9E67-8847-099D-93B25F70D519}"/>
-              </a:ext>
-            </a:extLst>
-          </p:cNvPr>
-          <p:cNvSpPr/>
-          <p:nvPr/>
-        </p:nvSpPr>
-        <p:spPr>
-          <a:xfrm>
-            <a:off x="105514" y="20544563"/>
-            <a:ext cx="11327260" cy="12282397"/>
-          </a:xfrm>
-          <a:prstGeom prst="rect">
-            <a:avLst/>
-          </a:prstGeom>
-          <a:noFill/>
-          <a:ln w="127000">
-            <a:solidFill>
-              <a:schemeClr val="tx1"/>
-            </a:solidFill>
-          </a:ln>
-        </p:spPr>
-        <p:style>
-          <a:lnRef idx="2">
-            <a:schemeClr val="accent1"/>
-          </a:lnRef>
-          <a:fillRef idx="1">
-            <a:schemeClr val="lt1"/>
-          </a:fillRef>
-          <a:effectRef idx="0">
-            <a:schemeClr val="accent1"/>
-          </a:effectRef>
-          <a:fontRef idx="minor">
-            <a:schemeClr val="dk1"/>
-          </a:fontRef>
-        </p:style>
-        <p:txBody>
-          <a:bodyPr rtlCol="0" anchor="ctr"/>
-          <a:lstStyle/>
-          <a:p>
-            <a:pPr algn="ctr"/>
-            <a:endParaRPr lang="en-US"/>
-          </a:p>
-        </p:txBody>
-      </p:sp>
-      <p:sp>
-        <p:nvSpPr>
-          <p:cNvPr id="28" name="Rectangle 27">
-            <a:extLst>
-              <a:ext uri="{FF2B5EF4-FFF2-40B4-BE49-F238E27FC236}">
-                <a16:creationId xmlns:a16="http://schemas.microsoft.com/office/drawing/2014/main" id="{ACCB9890-107A-50AC-8A62-236DDE5666A7}"/>
-              </a:ext>
-            </a:extLst>
-          </p:cNvPr>
-          <p:cNvSpPr/>
-          <p:nvPr/>
-        </p:nvSpPr>
-        <p:spPr>
-          <a:xfrm>
-            <a:off x="38148434" y="22280301"/>
-            <a:ext cx="11095975" cy="10704087"/>
-          </a:xfrm>
-          <a:prstGeom prst="rect">
-            <a:avLst/>
-          </a:prstGeom>
-          <a:noFill/>
-          <a:ln w="127000">
-            <a:solidFill>
-              <a:schemeClr val="tx1"/>
-            </a:solidFill>
-          </a:ln>
-        </p:spPr>
-        <p:style>
-          <a:lnRef idx="2">
-            <a:schemeClr val="accent1"/>
-          </a:lnRef>
-          <a:fillRef idx="1">
-            <a:schemeClr val="lt1"/>
-          </a:fillRef>
-          <a:effectRef idx="0">
-            <a:schemeClr val="accent1"/>
-          </a:effectRef>
-          <a:fontRef idx="minor">
-            <a:schemeClr val="dk1"/>
-          </a:fontRef>
-        </p:style>
-        <p:txBody>
-          <a:bodyPr rtlCol="0" anchor="ctr"/>
-          <a:lstStyle/>
-          <a:p>
-            <a:pPr algn="ctr"/>
-            <a:endParaRPr lang="en-US"/>
-          </a:p>
-        </p:txBody>
-      </p:sp>
-      <p:sp>
-        <p:nvSpPr>
-          <p:cNvPr id="29" name="Rectangle 28">
-            <a:extLst>
-              <a:ext uri="{FF2B5EF4-FFF2-40B4-BE49-F238E27FC236}">
-                <a16:creationId xmlns:a16="http://schemas.microsoft.com/office/drawing/2014/main" id="{99A87BE6-C151-17FC-1E46-2CDCA5BCE917}"/>
-              </a:ext>
-            </a:extLst>
-          </p:cNvPr>
-          <p:cNvSpPr/>
-          <p:nvPr/>
-        </p:nvSpPr>
-        <p:spPr>
-          <a:xfrm>
-            <a:off x="38156358" y="4395531"/>
-            <a:ext cx="11095975" cy="17126055"/>
-          </a:xfrm>
-          <a:prstGeom prst="rect">
-            <a:avLst/>
-          </a:prstGeom>
-          <a:noFill/>
-          <a:ln w="127000">
-            <a:solidFill>
-              <a:schemeClr val="tx1"/>
-            </a:solidFill>
-          </a:ln>
-        </p:spPr>
-        <p:style>
-          <a:lnRef idx="2">
-            <a:schemeClr val="accent1"/>
-          </a:lnRef>
-          <a:fillRef idx="1">
-            <a:schemeClr val="lt1"/>
-          </a:fillRef>
-          <a:effectRef idx="0">
-            <a:schemeClr val="accent1"/>
-          </a:effectRef>
-          <a:fontRef idx="minor">
-            <a:schemeClr val="dk1"/>
-          </a:fontRef>
-        </p:style>
-        <p:txBody>
-          <a:bodyPr rtlCol="0" anchor="ctr"/>
-          <a:lstStyle/>
-          <a:p>
-            <a:pPr algn="ctr"/>
-            <a:endParaRPr lang="en-US"/>
-          </a:p>
-        </p:txBody>
-      </p:sp>
-      <p:sp>
-        <p:nvSpPr>
-          <p:cNvPr id="31" name="Rectangle 30">
-            <a:extLst>
-              <a:ext uri="{FF2B5EF4-FFF2-40B4-BE49-F238E27FC236}">
-                <a16:creationId xmlns:a16="http://schemas.microsoft.com/office/drawing/2014/main" id="{69CAF7D0-A812-B6C7-FBF5-A06F0E96CCAF}"/>
-              </a:ext>
-            </a:extLst>
-          </p:cNvPr>
-          <p:cNvSpPr/>
-          <p:nvPr/>
-        </p:nvSpPr>
-        <p:spPr>
-          <a:xfrm>
-            <a:off x="63116" y="15963003"/>
-            <a:ext cx="11323186" cy="3646510"/>
-          </a:xfrm>
-          <a:prstGeom prst="rect">
-            <a:avLst/>
-          </a:prstGeom>
-          <a:noFill/>
-          <a:ln w="127000">
-            <a:solidFill>
-              <a:schemeClr val="tx1"/>
-            </a:solidFill>
-          </a:ln>
-        </p:spPr>
-        <p:style>
-          <a:lnRef idx="2">
-            <a:schemeClr val="accent1"/>
-          </a:lnRef>
-          <a:fillRef idx="1">
-            <a:schemeClr val="lt1"/>
-          </a:fillRef>
-          <a:effectRef idx="0">
-            <a:schemeClr val="accent1"/>
-          </a:effectRef>
-          <a:fontRef idx="minor">
-            <a:schemeClr val="dk1"/>
-          </a:fontRef>
-        </p:style>
-        <p:txBody>
-          <a:bodyPr rtlCol="0" anchor="ctr"/>
-          <a:lstStyle/>
-          <a:p>
-            <a:pPr algn="ctr"/>
-            <a:endParaRPr lang="en-US"/>
-          </a:p>
-        </p:txBody>
-      </p:sp>
-      <p:pic>
-        <p:nvPicPr>
-          <p:cNvPr id="44" name="Picture 43" descr="A red and white symbol with a black background&#10;&#10;Description automatically generated">
-            <a:extLst>
-              <a:ext uri="{FF2B5EF4-FFF2-40B4-BE49-F238E27FC236}">
-                <a16:creationId xmlns:a16="http://schemas.microsoft.com/office/drawing/2014/main" id="{4037FBE1-9ECA-C0D3-371B-B07926F454DC}"/>
+                <a16:creationId xmlns:a16="http://schemas.microsoft.com/office/drawing/2014/main" id="{0B5F64C5-8312-638D-3C26-DD89FC00309A}"/>
               </a:ext>
             </a:extLst>
           </p:cNvPr>
@@ -6803,15 +6058,21 @@
           <p:nvPr/>
         </p:nvPicPr>
         <p:blipFill>
-          <a:blip r:embed="rId17"/>
+          <a:blip r:embed="rId11">
+            <a:extLst>
+              <a:ext uri="{28A0092B-C50C-407E-A947-70E740481C1C}">
+                <a14:useLocalDpi xmlns:a14="http://schemas.microsoft.com/office/drawing/2010/main" val="0"/>
+              </a:ext>
+            </a:extLst>
+          </a:blip>
           <a:stretch>
             <a:fillRect/>
           </a:stretch>
         </p:blipFill>
         <p:spPr>
           <a:xfrm>
-            <a:off x="47528445" y="31400847"/>
-            <a:ext cx="1311587" cy="1311587"/>
+            <a:off x="38691818" y="16648860"/>
+            <a:ext cx="3168173" cy="3149077"/>
           </a:xfrm>
           <a:prstGeom prst="rect">
             <a:avLst/>
@@ -6820,10 +6081,10 @@
       </p:pic>
       <p:pic>
         <p:nvPicPr>
-          <p:cNvPr id="45" name="Picture 44" descr="A black and red logo&#10;&#10;Description automatically generated">
+          <p:cNvPr id="42" name="Picture 41" descr="Logistic-regression plot of predicted written-consent preference against median age. The fitted probability decreases from about 97% at age 20 to about 30% at age 70; uncertainty increases at higher ages. This is the negative age association highlighted in the poster.">
             <a:extLst>
               <a:ext uri="{FF2B5EF4-FFF2-40B4-BE49-F238E27FC236}">
-                <a16:creationId xmlns:a16="http://schemas.microsoft.com/office/drawing/2014/main" id="{688D1896-15B4-5A0A-BB73-F35D286D43D5}"/>
+                <a16:creationId xmlns:a16="http://schemas.microsoft.com/office/drawing/2014/main" id="{DF54D50F-E946-257F-E75B-FC639882A7C9}"/>
               </a:ext>
             </a:extLst>
           </p:cNvPr>
@@ -6833,21 +6094,795 @@
           <p:nvPr/>
         </p:nvPicPr>
         <p:blipFill>
-          <a:blip r:embed="rId18"/>
+          <a:blip r:embed="rId12">
+            <a:extLst>
+              <a:ext uri="{28A0092B-C50C-407E-A947-70E740481C1C}">
+                <a14:useLocalDpi xmlns:a14="http://schemas.microsoft.com/office/drawing/2010/main" val="0"/>
+              </a:ext>
+            </a:extLst>
+          </a:blip>
           <a:stretch>
             <a:fillRect/>
           </a:stretch>
         </p:blipFill>
         <p:spPr>
           <a:xfrm>
-            <a:off x="342092" y="822956"/>
-            <a:ext cx="5908577" cy="1904417"/>
+            <a:off x="45559282" y="16648860"/>
+            <a:ext cx="3168173" cy="3149077"/>
           </a:xfrm>
           <a:prstGeom prst="rect">
             <a:avLst/>
           </a:prstGeom>
         </p:spPr>
       </p:pic>
+      <p:pic>
+        <p:nvPicPr>
+          <p:cNvPr id="43" name="Picture 42" descr="Logistic-regression plot of predicted written-consent preference against percentage of Black residents. The fitted probability rises slightly, from about 80% at 0% Black residents to about 90% at 50%, but the uncertainty band widens substantially. The poster reports no reliable association.">
+            <a:extLst>
+              <a:ext uri="{FF2B5EF4-FFF2-40B4-BE49-F238E27FC236}">
+                <a16:creationId xmlns:a16="http://schemas.microsoft.com/office/drawing/2014/main" id="{944FCB29-67B0-DBD5-6006-55E491D1C1EF}"/>
+              </a:ext>
+            </a:extLst>
+          </p:cNvPr>
+          <p:cNvPicPr>
+            <a:picLocks noChangeAspect="1"/>
+          </p:cNvPicPr>
+          <p:nvPr/>
+        </p:nvPicPr>
+        <p:blipFill>
+          <a:blip r:embed="rId13">
+            <a:extLst>
+              <a:ext uri="{28A0092B-C50C-407E-A947-70E740481C1C}">
+                <a14:useLocalDpi xmlns:a14="http://schemas.microsoft.com/office/drawing/2010/main" val="0"/>
+              </a:ext>
+            </a:extLst>
+          </a:blip>
+          <a:stretch>
+            <a:fillRect/>
+          </a:stretch>
+        </p:blipFill>
+        <p:spPr>
+          <a:xfrm>
+            <a:off x="42079037" y="16648860"/>
+            <a:ext cx="3168173" cy="3149077"/>
+          </a:xfrm>
+          <a:prstGeom prst="rect">
+            <a:avLst/>
+          </a:prstGeom>
+        </p:spPr>
+      </p:pic>
+      <p:sp>
+        <p:nvSpPr>
+          <p:cNvPr id="34" name="TextBox 33">
+            <a:extLst>
+              <a:ext uri="{FF2B5EF4-FFF2-40B4-BE49-F238E27FC236}">
+                <a16:creationId xmlns:a16="http://schemas.microsoft.com/office/drawing/2014/main" id="{CAEDF038-3452-143A-433F-10ECCF58EF1E}"/>
+              </a:ext>
+            </a:extLst>
+          </p:cNvPr>
+          <p:cNvSpPr txBox="1"/>
+          <p:nvPr/>
+        </p:nvSpPr>
+        <p:spPr>
+          <a:xfrm>
+            <a:off x="12121014" y="12718441"/>
+            <a:ext cx="11593246" cy="7048083"/>
+          </a:xfrm>
+          <a:prstGeom prst="rect">
+            <a:avLst/>
+          </a:prstGeom>
+          <a:noFill/>
+        </p:spPr>
+        <p:txBody>
+          <a:bodyPr wrap="square" rtlCol="0">
+            <a:spAutoFit/>
+          </a:bodyPr>
+          <a:lstStyle/>
+          <a:p>
+            <a:r>
+              <a:rPr lang="en-US" sz="9200" b="1" dirty="0">
+                <a:solidFill>
+                  <a:schemeClr val="accent4"/>
+                </a:solidFill>
+                <a:latin typeface="Atkinson Hyperlegible" pitchFamily="2" charset="77"/>
+                <a:cs typeface="Times New Roman" panose="02020603050405020304" pitchFamily="18" charset="0"/>
+              </a:rPr>
+              <a:t>Waiver preference </a:t>
+            </a:r>
+            <a:r>
+              <a:rPr lang="en-US" sz="7200" b="1" dirty="0">
+                <a:solidFill>
+                  <a:schemeClr val="bg2"/>
+                </a:solidFill>
+                <a:latin typeface="Atkinson Hyperlegible" pitchFamily="2" charset="77"/>
+                <a:cs typeface="Times New Roman" panose="02020603050405020304" pitchFamily="18" charset="0"/>
+              </a:rPr>
+              <a:t>is </a:t>
+            </a:r>
+            <a:r>
+              <a:rPr lang="en-US" sz="7200" b="1" dirty="0">
+                <a:solidFill>
+                  <a:schemeClr val="accent4">
+                    <a:lumMod val="20000"/>
+                    <a:lumOff val="80000"/>
+                  </a:schemeClr>
+                </a:solidFill>
+                <a:latin typeface="Atkinson Hyperlegible" pitchFamily="2" charset="77"/>
+                <a:cs typeface="Times New Roman" panose="02020603050405020304" pitchFamily="18" charset="0"/>
+              </a:rPr>
+              <a:t>negatively</a:t>
+            </a:r>
+            <a:r>
+              <a:rPr lang="en-US" sz="7200" b="1" dirty="0">
+                <a:solidFill>
+                  <a:schemeClr val="bg2"/>
+                </a:solidFill>
+                <a:latin typeface="Atkinson Hyperlegible" pitchFamily="2" charset="77"/>
+                <a:cs typeface="Times New Roman" panose="02020603050405020304" pitchFamily="18" charset="0"/>
+              </a:rPr>
+              <a:t> associated with median </a:t>
+            </a:r>
+            <a:r>
+              <a:rPr lang="en-US" sz="7200" b="1" dirty="0">
+                <a:solidFill>
+                  <a:schemeClr val="accent4"/>
+                </a:solidFill>
+                <a:latin typeface="Atkinson Hyperlegible" pitchFamily="2" charset="77"/>
+                <a:cs typeface="Times New Roman" panose="02020603050405020304" pitchFamily="18" charset="0"/>
+              </a:rPr>
+              <a:t>age</a:t>
+            </a:r>
+            <a:r>
+              <a:rPr lang="en-US" sz="7200" b="1" dirty="0">
+                <a:solidFill>
+                  <a:srgbClr val="D00000"/>
+                </a:solidFill>
+                <a:latin typeface="Atkinson Hyperlegible" pitchFamily="2" charset="77"/>
+                <a:cs typeface="Times New Roman" panose="02020603050405020304" pitchFamily="18" charset="0"/>
+              </a:rPr>
+              <a:t> </a:t>
+            </a:r>
+            <a:r>
+              <a:rPr lang="en-US" sz="7200" b="1" dirty="0">
+                <a:solidFill>
+                  <a:schemeClr val="bg2"/>
+                </a:solidFill>
+                <a:latin typeface="Atkinson Hyperlegible" pitchFamily="2" charset="77"/>
+                <a:cs typeface="Times New Roman" panose="02020603050405020304" pitchFamily="18" charset="0"/>
+              </a:rPr>
+              <a:t>but not median</a:t>
+            </a:r>
+            <a:r>
+              <a:rPr lang="en-US" sz="7200" b="1" dirty="0">
+                <a:solidFill>
+                  <a:schemeClr val="accent4"/>
+                </a:solidFill>
+                <a:latin typeface="Atkinson Hyperlegible" pitchFamily="2" charset="77"/>
+                <a:cs typeface="Times New Roman" panose="02020603050405020304" pitchFamily="18" charset="0"/>
+              </a:rPr>
+              <a:t> income </a:t>
+            </a:r>
+            <a:r>
+              <a:rPr lang="en-US" sz="7200" b="1" dirty="0">
+                <a:solidFill>
+                  <a:schemeClr val="bg2"/>
+                </a:solidFill>
+                <a:latin typeface="Atkinson Hyperlegible" pitchFamily="2" charset="77"/>
+                <a:cs typeface="Times New Roman" panose="02020603050405020304" pitchFamily="18" charset="0"/>
+              </a:rPr>
+              <a:t>or the percentage of 	</a:t>
+            </a:r>
+          </a:p>
+          <a:p>
+            <a:r>
+              <a:rPr lang="en-US" sz="7200" b="1" dirty="0">
+                <a:solidFill>
+                  <a:schemeClr val="accent4"/>
+                </a:solidFill>
+                <a:latin typeface="Atkinson Hyperlegible" pitchFamily="2" charset="77"/>
+                <a:cs typeface="Times New Roman" panose="02020603050405020304" pitchFamily="18" charset="0"/>
+              </a:rPr>
+              <a:t>Black residents</a:t>
+            </a:r>
+            <a:r>
+              <a:rPr lang="en-US" sz="7200" b="1" dirty="0">
+                <a:solidFill>
+                  <a:schemeClr val="bg2"/>
+                </a:solidFill>
+                <a:latin typeface="Atkinson Hyperlegible" pitchFamily="2" charset="77"/>
+                <a:cs typeface="Times New Roman" panose="02020603050405020304" pitchFamily="18" charset="0"/>
+              </a:rPr>
+              <a:t>…</a:t>
+            </a:r>
+          </a:p>
+        </p:txBody>
+      </p:sp>
+      <p:grpSp>
+        <p:nvGrpSpPr>
+          <p:cNvPr id="16" name="Group 15" descr="Correlation matrix. Median age correlates with waiver preference at −0.225 (two asterisks), median income at −0.138 (one asterisk), and percentage of Black residents at −0.350 (two asterisks). Median income correlates with percentage of Black residents at −0.132 (one asterisk) and waiver preference at 0.074. Percentage of Black residents correlates with waiver preference at 0.083. The image does not state the asterisk significance thresholds.">
+            <a:extLst>
+              <a:ext uri="{FF2B5EF4-FFF2-40B4-BE49-F238E27FC236}">
+                <a16:creationId xmlns:a16="http://schemas.microsoft.com/office/drawing/2014/main" id="{7F106CD3-D11C-59FA-A3F2-465D604DDFDE}"/>
+              </a:ext>
+            </a:extLst>
+          </p:cNvPr>
+          <p:cNvGrpSpPr/>
+          <p:nvPr/>
+        </p:nvGrpSpPr>
+        <p:grpSpPr>
+          <a:xfrm>
+            <a:off x="27755494" y="11318757"/>
+            <a:ext cx="9439785" cy="9465039"/>
+            <a:chOff x="27703482" y="10942167"/>
+            <a:chExt cx="9439785" cy="9465039"/>
+          </a:xfrm>
+        </p:grpSpPr>
+        <p:sp>
+          <p:nvSpPr>
+            <p:cNvPr id="13" name="Oval 12">
+              <a:extLst>
+                <a:ext uri="{FF2B5EF4-FFF2-40B4-BE49-F238E27FC236}">
+                  <a16:creationId xmlns:a16="http://schemas.microsoft.com/office/drawing/2014/main" id="{13BB6B60-61E8-D4F7-882E-1134615628B3}"/>
+                </a:ext>
+              </a:extLst>
+            </p:cNvPr>
+            <p:cNvSpPr/>
+            <p:nvPr/>
+          </p:nvSpPr>
+          <p:spPr>
+            <a:xfrm>
+              <a:off x="27703482" y="10942167"/>
+              <a:ext cx="9439785" cy="9465039"/>
+            </a:xfrm>
+            <a:prstGeom prst="ellipse">
+              <a:avLst/>
+            </a:prstGeom>
+            <a:solidFill>
+              <a:schemeClr val="accent4"/>
+            </a:solidFill>
+            <a:ln w="127000">
+              <a:solidFill>
+                <a:schemeClr val="accent1">
+                  <a:shade val="15000"/>
+                </a:schemeClr>
+              </a:solidFill>
+            </a:ln>
+          </p:spPr>
+          <p:style>
+            <a:lnRef idx="2">
+              <a:schemeClr val="accent4"/>
+            </a:lnRef>
+            <a:fillRef idx="1">
+              <a:schemeClr val="lt1"/>
+            </a:fillRef>
+            <a:effectRef idx="0">
+              <a:schemeClr val="accent4"/>
+            </a:effectRef>
+            <a:fontRef idx="minor">
+              <a:schemeClr val="dk1"/>
+            </a:fontRef>
+          </p:style>
+          <p:txBody>
+            <a:bodyPr rtlCol="0" anchor="ctr"/>
+            <a:lstStyle/>
+            <a:p>
+              <a:pPr algn="ctr"/>
+              <a:endParaRPr lang="en-US" dirty="0"/>
+            </a:p>
+          </p:txBody>
+        </p:sp>
+        <p:pic>
+          <p:nvPicPr>
+            <p:cNvPr id="20" name="Picture 19" descr="Correlation matrix. Median age correlates with waiver preference at −0.225 (two asterisks), median income at −0.138 (one asterisk), and percentage of Black residents at −0.350 (two asterisks). Median income correlates with percentage of Black residents at −0.132 (one asterisk) and waiver preference at 0.074. Percentage of Black residents correlates with waiver preference at 0.083. The image does not state the asterisk significance thresholds.">
+              <a:extLst>
+                <a:ext uri="{FF2B5EF4-FFF2-40B4-BE49-F238E27FC236}">
+                  <a16:creationId xmlns:a16="http://schemas.microsoft.com/office/drawing/2014/main" id="{4C0DC5EB-A727-DEFF-E9F6-3D0ED2D8DF8E}"/>
+                </a:ext>
+              </a:extLst>
+            </p:cNvPr>
+            <p:cNvPicPr>
+              <a:picLocks noChangeAspect="1"/>
+            </p:cNvPicPr>
+            <p:nvPr/>
+          </p:nvPicPr>
+          <p:blipFill>
+            <a:blip r:embed="rId15">
+              <a:extLst>
+                <a:ext uri="{28A0092B-C50C-407E-A947-70E740481C1C}">
+                  <a14:useLocalDpi xmlns:a14="http://schemas.microsoft.com/office/drawing/2010/main" val="0"/>
+                </a:ext>
+              </a:extLst>
+            </a:blip>
+            <a:stretch>
+              <a:fillRect/>
+            </a:stretch>
+          </p:blipFill>
+          <p:spPr>
+            <a:xfrm>
+              <a:off x="29229263" y="12577889"/>
+              <a:ext cx="6586415" cy="6385750"/>
+            </a:xfrm>
+            <a:prstGeom prst="rect">
+              <a:avLst/>
+            </a:prstGeom>
+            <a:solidFill>
+              <a:schemeClr val="accent4"/>
+            </a:solidFill>
+            <a:ln w="127000">
+              <a:noFill/>
+            </a:ln>
+          </p:spPr>
+        </p:pic>
+      </p:grpSp>
+      <p:sp>
+        <p:nvSpPr>
+          <p:cNvPr id="33" name="TextBox 32">
+            <a:extLst>
+              <a:ext uri="{FF2B5EF4-FFF2-40B4-BE49-F238E27FC236}">
+                <a16:creationId xmlns:a16="http://schemas.microsoft.com/office/drawing/2014/main" id="{CB85B75B-CB15-5E7F-4615-F72E78889FED}"/>
+              </a:ext>
+            </a:extLst>
+          </p:cNvPr>
+          <p:cNvSpPr txBox="1"/>
+          <p:nvPr/>
+        </p:nvSpPr>
+        <p:spPr>
+          <a:xfrm>
+            <a:off x="13987076" y="23451556"/>
+            <a:ext cx="21471185" cy="3416320"/>
+          </a:xfrm>
+          <a:prstGeom prst="rect">
+            <a:avLst/>
+          </a:prstGeom>
+          <a:noFill/>
+        </p:spPr>
+        <p:txBody>
+          <a:bodyPr wrap="square" rtlCol="0">
+            <a:spAutoFit/>
+          </a:bodyPr>
+          <a:lstStyle/>
+          <a:p>
+            <a:r>
+              <a:rPr lang="en-US" sz="7200" b="1" dirty="0">
+                <a:latin typeface="Atkinson Hyperlegible" pitchFamily="2" charset="77"/>
+                <a:cs typeface="Times New Roman" panose="02020603050405020304" pitchFamily="18" charset="0"/>
+              </a:rPr>
+              <a:t>Police Departments serving </a:t>
+            </a:r>
+            <a:r>
+              <a:rPr lang="en-US" sz="7200" b="1" dirty="0">
+                <a:solidFill>
+                  <a:srgbClr val="D00000"/>
+                </a:solidFill>
+                <a:latin typeface="Atkinson Hyperlegible" pitchFamily="2" charset="77"/>
+                <a:cs typeface="Times New Roman" panose="02020603050405020304" pitchFamily="18" charset="0"/>
+              </a:rPr>
+              <a:t>younger populations </a:t>
+            </a:r>
+            <a:r>
+              <a:rPr lang="en-US" sz="7200" b="1" dirty="0">
+                <a:latin typeface="Atkinson Hyperlegible" pitchFamily="2" charset="77"/>
+                <a:cs typeface="Times New Roman" panose="02020603050405020304" pitchFamily="18" charset="0"/>
+              </a:rPr>
+              <a:t>may respond differently	to calls for consent search reforms…</a:t>
+            </a:r>
+            <a:endParaRPr lang="en-US" sz="7200" b="1" dirty="0">
+              <a:solidFill>
+                <a:schemeClr val="tx1">
+                  <a:lumMod val="65000"/>
+                  <a:lumOff val="35000"/>
+                </a:schemeClr>
+              </a:solidFill>
+              <a:latin typeface="Atkinson Hyperlegible" pitchFamily="2" charset="77"/>
+              <a:cs typeface="Times New Roman" panose="02020603050405020304" pitchFamily="18" charset="0"/>
+            </a:endParaRPr>
+          </a:p>
+        </p:txBody>
+      </p:sp>
+      <p:pic>
+        <p:nvPicPr>
+          <p:cNvPr id="35" name="Picture 34" descr="Massachusetts municipal median household income map. Light pink to dark red represents approximately $50,000 to $250,000. Higher-income areas cluster west of Boston; most municipalities are lighter pink. This is descriptive context; the poster reports no association between median income and written-consent preference.">
+            <a:extLst>
+              <a:ext uri="{FF2B5EF4-FFF2-40B4-BE49-F238E27FC236}">
+                <a16:creationId xmlns:a16="http://schemas.microsoft.com/office/drawing/2014/main" id="{7A33CF85-812E-DDEB-6B43-7250AB6ED28A}"/>
+              </a:ext>
+            </a:extLst>
+          </p:cNvPr>
+          <p:cNvPicPr>
+            <a:picLocks noChangeAspect="1"/>
+          </p:cNvPicPr>
+          <p:nvPr/>
+        </p:nvPicPr>
+        <p:blipFill>
+          <a:blip r:embed="rId8">
+            <a:extLst>
+              <a:ext uri="{28A0092B-C50C-407E-A947-70E740481C1C}">
+                <a14:useLocalDpi xmlns:a14="http://schemas.microsoft.com/office/drawing/2010/main" val="0"/>
+              </a:ext>
+            </a:extLst>
+          </a:blip>
+          <a:stretch>
+            <a:fillRect/>
+          </a:stretch>
+        </p:blipFill>
+        <p:spPr>
+          <a:xfrm>
+            <a:off x="12220276" y="27419590"/>
+            <a:ext cx="8164615" cy="5013084"/>
+          </a:xfrm>
+          <a:prstGeom prst="rect">
+            <a:avLst/>
+          </a:prstGeom>
+        </p:spPr>
+      </p:pic>
+      <p:pic>
+        <p:nvPicPr>
+          <p:cNvPr id="38" name="Picture 37" descr="Two Massachusetts maps show population percentages on a red-to-blue scale from 0% to 100%. The left map represents Black residents and is predominantly at the low end; the right is predominantly at the high end. The displayed image does not label the right-hand population group. The regression analysis uses the percentage of Black residents and reports no association with written-consent preference.">
+            <a:extLst>
+              <a:ext uri="{FF2B5EF4-FFF2-40B4-BE49-F238E27FC236}">
+                <a16:creationId xmlns:a16="http://schemas.microsoft.com/office/drawing/2014/main" id="{0A9B6E0D-443F-3E3E-50FA-B6DD74DF4B04}"/>
+              </a:ext>
+            </a:extLst>
+          </p:cNvPr>
+          <p:cNvPicPr>
+            <a:picLocks noChangeAspect="1"/>
+          </p:cNvPicPr>
+          <p:nvPr/>
+        </p:nvPicPr>
+        <p:blipFill>
+          <a:blip r:embed="rId9">
+            <a:extLst>
+              <a:ext uri="{28A0092B-C50C-407E-A947-70E740481C1C}">
+                <a14:useLocalDpi xmlns:a14="http://schemas.microsoft.com/office/drawing/2010/main" val="0"/>
+              </a:ext>
+            </a:extLst>
+          </a:blip>
+          <a:stretch>
+            <a:fillRect/>
+          </a:stretch>
+        </p:blipFill>
+        <p:spPr>
+          <a:xfrm>
+            <a:off x="19997157" y="26797417"/>
+            <a:ext cx="9451025" cy="5802943"/>
+          </a:xfrm>
+          <a:prstGeom prst="rect">
+            <a:avLst/>
+          </a:prstGeom>
+        </p:spPr>
+      </p:pic>
+      <p:pic>
+        <p:nvPicPr>
+          <p:cNvPr id="39" name="Picture 38" descr="Massachusetts municipal median-age map, with legend ticks at 30, 40, 50, and 60 years. Darker red represents older populations, including much of Cape Cod; younger areas are lighter. The poster reports that written-consent preference is more common in municipalities with younger populations.">
+            <a:extLst>
+              <a:ext uri="{FF2B5EF4-FFF2-40B4-BE49-F238E27FC236}">
+                <a16:creationId xmlns:a16="http://schemas.microsoft.com/office/drawing/2014/main" id="{7CA407B0-1E2E-D461-74F5-75D722253A16}"/>
+              </a:ext>
+            </a:extLst>
+          </p:cNvPr>
+          <p:cNvPicPr>
+            <a:picLocks noChangeAspect="1"/>
+          </p:cNvPicPr>
+          <p:nvPr/>
+        </p:nvPicPr>
+        <p:blipFill>
+          <a:blip r:embed="rId10">
+            <a:extLst>
+              <a:ext uri="{28A0092B-C50C-407E-A947-70E740481C1C}">
+                <a14:useLocalDpi xmlns:a14="http://schemas.microsoft.com/office/drawing/2010/main" val="0"/>
+              </a:ext>
+            </a:extLst>
+          </a:blip>
+          <a:stretch>
+            <a:fillRect/>
+          </a:stretch>
+        </p:blipFill>
+        <p:spPr>
+          <a:xfrm>
+            <a:off x="28399547" y="27407069"/>
+            <a:ext cx="8753870" cy="5374888"/>
+          </a:xfrm>
+          <a:prstGeom prst="rect">
+            <a:avLst/>
+          </a:prstGeom>
+        </p:spPr>
+      </p:pic>
+      <p:sp>
+        <p:nvSpPr>
+          <p:cNvPr id="83" name="Text Box 34">
+            <a:extLst>
+              <a:ext uri="{FF2B5EF4-FFF2-40B4-BE49-F238E27FC236}">
+                <a16:creationId xmlns:a16="http://schemas.microsoft.com/office/drawing/2014/main" id="{5A798C10-EDDD-4636-4D67-3840C46FA6B6}"/>
+              </a:ext>
+            </a:extLst>
+          </p:cNvPr>
+          <p:cNvSpPr txBox="1"/>
+          <p:nvPr/>
+        </p:nvSpPr>
+        <p:spPr>
+          <a:xfrm>
+            <a:off x="37851499" y="21533236"/>
+            <a:ext cx="11593245" cy="850394"/>
+          </a:xfrm>
+          <a:prstGeom prst="rect">
+            <a:avLst/>
+          </a:prstGeom>
+          <a:solidFill>
+            <a:srgbClr val="D00000"/>
+          </a:solidFill>
+          <a:ln w="12700">
+            <a:miter lim="400000"/>
+          </a:ln>
+          <a:extLst>
+            <a:ext uri="{C572A759-6A51-4108-AA02-DFA0A04FC94B}">
+              <ma14:wrappingTextBoxFlag xmlns="" xmlns:m="http://schemas.openxmlformats.org/officeDocument/2006/math" xmlns:a14="http://schemas.microsoft.com/office/drawing/2010/main" xmlns:ma14="http://schemas.microsoft.com/office/mac/drawingml/2011/main" val="1"/>
+            </a:ext>
+          </a:extLst>
+        </p:spPr>
+        <p:txBody>
+          <a:bodyPr wrap="square" lIns="45710" tIns="45710" rIns="45710" bIns="45710">
+            <a:spAutoFit/>
+          </a:bodyPr>
+          <a:lstStyle>
+            <a:lvl1pPr algn="ctr">
+              <a:spcBef>
+                <a:spcPts val="2500"/>
+              </a:spcBef>
+              <a:defRPr sz="4800" b="1">
+                <a:solidFill>
+                  <a:srgbClr val="FFFFFF"/>
+                </a:solidFill>
+                <a:latin typeface="Arial"/>
+                <a:ea typeface="Arial"/>
+                <a:cs typeface="Arial"/>
+                <a:sym typeface="Arial"/>
+              </a:defRPr>
+            </a:lvl1pPr>
+          </a:lstStyle>
+          <a:p>
+            <a:r>
+              <a:rPr lang="en-US" dirty="0">
+                <a:latin typeface="Atkinson Hyperlegible" pitchFamily="2" charset="77"/>
+              </a:rPr>
+              <a:t>Discussion</a:t>
+            </a:r>
+            <a:endParaRPr dirty="0">
+              <a:latin typeface="Atkinson Hyperlegible" pitchFamily="2" charset="77"/>
+            </a:endParaRPr>
+          </a:p>
+        </p:txBody>
+      </p:sp>
+      <p:sp>
+        <p:nvSpPr>
+          <p:cNvPr id="96" name="TextBox 95">
+            <a:extLst>
+              <a:ext uri="{FF2B5EF4-FFF2-40B4-BE49-F238E27FC236}">
+                <a16:creationId xmlns:a16="http://schemas.microsoft.com/office/drawing/2014/main" id="{7707E4A8-700A-6220-BB9D-A2E0268E1CB1}"/>
+              </a:ext>
+            </a:extLst>
+          </p:cNvPr>
+          <p:cNvSpPr txBox="1"/>
+          <p:nvPr/>
+        </p:nvSpPr>
+        <p:spPr>
+          <a:xfrm>
+            <a:off x="38312795" y="22705151"/>
+            <a:ext cx="10591900" cy="8435258"/>
+          </a:xfrm>
+          <a:prstGeom prst="rect">
+            <a:avLst/>
+          </a:prstGeom>
+          <a:noFill/>
+        </p:spPr>
+        <p:txBody>
+          <a:bodyPr wrap="square">
+            <a:spAutoFit/>
+          </a:bodyPr>
+          <a:lstStyle/>
+          <a:p>
+            <a:pPr marL="457200" indent="-457200">
+              <a:lnSpc>
+                <a:spcPct val="120000"/>
+              </a:lnSpc>
+              <a:buFont typeface="Arial" panose="020B0604020202020204" pitchFamily="34" charset="0"/>
+              <a:buChar char="•"/>
+            </a:pPr>
+            <a:r>
+              <a:rPr lang="en-US" altLang="en-US" sz="3200" dirty="0">
+                <a:latin typeface="Atkinson Hyperlegible" pitchFamily="2" charset="77"/>
+                <a:ea typeface="ＭＳ Ｐゴシック" panose="020B0600070205080204" pitchFamily="34" charset="-128"/>
+                <a:cs typeface="Times New Roman" panose="02020603050405020304" pitchFamily="18" charset="0"/>
+              </a:rPr>
+              <a:t>Towns younger residents prefer written consent to search waivers indication that there may be more political awareness around policing. </a:t>
+            </a:r>
+          </a:p>
+          <a:p>
+            <a:pPr marL="457200" indent="-457200">
+              <a:lnSpc>
+                <a:spcPct val="120000"/>
+              </a:lnSpc>
+              <a:buFont typeface="Arial" panose="020B0604020202020204" pitchFamily="34" charset="0"/>
+              <a:buChar char="•"/>
+            </a:pPr>
+            <a:r>
+              <a:rPr lang="en-US" altLang="en-US" sz="3200" dirty="0">
+                <a:latin typeface="Atkinson Hyperlegible" pitchFamily="2" charset="77"/>
+                <a:ea typeface="ＭＳ Ｐゴシック" panose="020B0600070205080204" pitchFamily="34" charset="-128"/>
+                <a:cs typeface="Times New Roman" panose="02020603050405020304" pitchFamily="18" charset="0"/>
+              </a:rPr>
+              <a:t>Looking at Cambridge, MA, a university town home to Harvard and MIT, may be more likely to adopt the written waiver policy as they may be more responsive to political needs of younger residents. </a:t>
+            </a:r>
+          </a:p>
+          <a:p>
+            <a:pPr marL="457200" indent="-457200">
+              <a:lnSpc>
+                <a:spcPct val="120000"/>
+              </a:lnSpc>
+              <a:buFont typeface="Arial" panose="020B0604020202020204" pitchFamily="34" charset="0"/>
+              <a:buChar char="•"/>
+            </a:pPr>
+            <a:r>
+              <a:rPr lang="en-US" altLang="en-US" sz="3200" dirty="0">
+                <a:latin typeface="Atkinson Hyperlegible" pitchFamily="2" charset="77"/>
+                <a:ea typeface="ＭＳ Ｐゴシック" panose="020B0600070205080204" pitchFamily="34" charset="-128"/>
+                <a:cs typeface="Times New Roman" panose="02020603050405020304" pitchFamily="18" charset="0"/>
+              </a:rPr>
+              <a:t>Increase of political and racial movements may allow for younger residents to be more aware of their rights. </a:t>
+            </a:r>
+          </a:p>
+          <a:p>
+            <a:pPr>
+              <a:lnSpc>
+                <a:spcPts val="4690"/>
+              </a:lnSpc>
+              <a:spcBef>
+                <a:spcPts val="135"/>
+              </a:spcBef>
+              <a:spcAft>
+                <a:spcPts val="135"/>
+              </a:spcAft>
+              <a:defRPr/>
+            </a:pPr>
+            <a:r>
+              <a:rPr lang="en-US" altLang="en-US" sz="3200" dirty="0">
+                <a:solidFill>
+                  <a:srgbClr val="D00000"/>
+                </a:solidFill>
+                <a:latin typeface="Atkinson Hyperlegible" pitchFamily="2" charset="77"/>
+                <a:cs typeface="Times New Roman" panose="02020603050405020304" pitchFamily="18" charset="0"/>
+              </a:rPr>
+              <a:t>Limitations: </a:t>
+            </a:r>
+            <a:r>
+              <a:rPr lang="en-US" altLang="en-US" sz="3200" dirty="0">
+                <a:latin typeface="Atkinson Hyperlegible" pitchFamily="2" charset="77"/>
+                <a:ea typeface="ＭＳ Ｐゴシック" panose="020B0600070205080204" pitchFamily="34" charset="-128"/>
+                <a:cs typeface="Times New Roman" panose="02020603050405020304" pitchFamily="18" charset="0"/>
+              </a:rPr>
+              <a:t>Did not locate policies from every municipal police department &amp; analyses limited to MA </a:t>
+            </a:r>
+            <a:endParaRPr lang="en-US" altLang="en-US" sz="3200" dirty="0">
+              <a:solidFill>
+                <a:srgbClr val="D00000"/>
+              </a:solidFill>
+              <a:latin typeface="Atkinson Hyperlegible" pitchFamily="2" charset="77"/>
+              <a:cs typeface="Times New Roman" panose="02020603050405020304" pitchFamily="18" charset="0"/>
+            </a:endParaRPr>
+          </a:p>
+          <a:p>
+            <a:pPr>
+              <a:lnSpc>
+                <a:spcPts val="4690"/>
+              </a:lnSpc>
+              <a:spcBef>
+                <a:spcPts val="135"/>
+              </a:spcBef>
+              <a:spcAft>
+                <a:spcPts val="135"/>
+              </a:spcAft>
+              <a:defRPr/>
+            </a:pPr>
+            <a:r>
+              <a:rPr lang="en-US" altLang="en-US" sz="3200" dirty="0">
+                <a:solidFill>
+                  <a:srgbClr val="D00000"/>
+                </a:solidFill>
+                <a:latin typeface="Atkinson Hyperlegible" pitchFamily="2" charset="77"/>
+                <a:cs typeface="Times New Roman" panose="02020603050405020304" pitchFamily="18" charset="0"/>
+              </a:rPr>
+              <a:t>Future Directions: </a:t>
+            </a:r>
+            <a:r>
+              <a:rPr lang="en-US" sz="3200" dirty="0">
+                <a:latin typeface="Atkinson Hyperlegible" pitchFamily="2" charset="77"/>
+                <a:ea typeface="Georgia" panose="02040502050405020303" pitchFamily="18" charset="0"/>
+                <a:cs typeface="Times New Roman" panose="02020603050405020304" pitchFamily="18" charset="0"/>
+              </a:rPr>
+              <a:t>Examine the implications of adopting formal waiver procedures for both departments and individual consent search decisions</a:t>
+            </a:r>
+          </a:p>
+        </p:txBody>
+      </p:sp>
+      <p:sp>
+        <p:nvSpPr>
+          <p:cNvPr id="36" name="TextBox 35">
+            <a:extLst>
+              <a:ext uri="{FF2B5EF4-FFF2-40B4-BE49-F238E27FC236}">
+                <a16:creationId xmlns:a16="http://schemas.microsoft.com/office/drawing/2014/main" id="{B6BDDB25-C0B3-B878-857E-9AF1DB3C9A82}"/>
+              </a:ext>
+            </a:extLst>
+          </p:cNvPr>
+          <p:cNvSpPr txBox="1"/>
+          <p:nvPr/>
+        </p:nvSpPr>
+        <p:spPr>
+          <a:xfrm>
+            <a:off x="38330923" y="31152059"/>
+            <a:ext cx="8891634" cy="1603003"/>
+          </a:xfrm>
+          <a:prstGeom prst="rect">
+            <a:avLst/>
+          </a:prstGeom>
+          <a:noFill/>
+        </p:spPr>
+        <p:txBody>
+          <a:bodyPr wrap="square">
+            <a:spAutoFit/>
+          </a:bodyPr>
+          <a:lstStyle/>
+          <a:p>
+            <a:pPr>
+              <a:lnSpc>
+                <a:spcPts val="4740"/>
+              </a:lnSpc>
+              <a:spcBef>
+                <a:spcPts val="0"/>
+              </a:spcBef>
+              <a:spcAft>
+                <a:spcPts val="600"/>
+              </a:spcAft>
+              <a:defRPr/>
+            </a:pPr>
+            <a:r>
+              <a:rPr lang="en-US" altLang="en-US" sz="3200" dirty="0">
+                <a:solidFill>
+                  <a:srgbClr val="D00000"/>
+                </a:solidFill>
+                <a:latin typeface="Atkinson Hyperlegible" pitchFamily="2" charset="77"/>
+                <a:ea typeface="ＭＳ Ｐゴシック" panose="020B0600070205080204" pitchFamily="34" charset="-128"/>
+                <a:cs typeface="Times New Roman" panose="02020603050405020304" pitchFamily="18" charset="0"/>
+              </a:rPr>
+              <a:t>Acknowledgements</a:t>
+            </a:r>
+          </a:p>
+          <a:p>
+            <a:pPr>
+              <a:spcBef>
+                <a:spcPts val="0"/>
+              </a:spcBef>
+              <a:defRPr/>
+            </a:pPr>
+            <a:r>
+              <a:rPr lang="en-US" altLang="en-US" sz="1800" dirty="0">
+                <a:solidFill>
+                  <a:srgbClr val="000000"/>
+                </a:solidFill>
+                <a:latin typeface="Atkinson Hyperlegible" pitchFamily="2" charset="77"/>
+                <a:cs typeface="Times New Roman" panose="02020603050405020304" pitchFamily="18" charset="0"/>
+              </a:rPr>
+              <a:t>We would like to thank the Law and Policy Lab at the University of Nebraska-Lincoln for their support, guidance, and work on this project. We would also like to thank the municipal Massachusetts police departments for their cooperation.</a:t>
+            </a:r>
+            <a:endParaRPr lang="en-US" altLang="en-US" sz="1800" dirty="0">
+              <a:solidFill>
+                <a:srgbClr val="C00000"/>
+              </a:solidFill>
+              <a:latin typeface="Atkinson Hyperlegible" pitchFamily="2" charset="77"/>
+              <a:ea typeface="ＭＳ Ｐゴシック" panose="020B0600070205080204" pitchFamily="34" charset="-128"/>
+              <a:cs typeface="Times New Roman" panose="02020603050405020304" pitchFamily="18" charset="0"/>
+            </a:endParaRPr>
+          </a:p>
+        </p:txBody>
+      </p:sp>
     </p:spTree>
     <p:extLst>
       <p:ext uri="{BB962C8B-B14F-4D97-AF65-F5344CB8AC3E}">
